--- a/Web/Server-Notes.pptx
+++ b/Web/Server-Notes.pptx
@@ -8,12 +8,12 @@
     <p:notesMasterId r:id="rId19"/>
   </p:notesMasterIdLst>
   <p:handoutMasterIdLst>
-    <p:handoutMasterId r:id="rId72"/>
+    <p:handoutMasterId r:id="rId78"/>
   </p:handoutMasterIdLst>
   <p:sldIdLst>
     <p:sldId id="256" r:id="rId3"/>
     <p:sldId id="402" r:id="rId4"/>
-    <p:sldId id="939" r:id="rId5"/>
+    <p:sldId id="943" r:id="rId5"/>
     <p:sldId id="366" r:id="rId6"/>
     <p:sldId id="754" r:id="rId7"/>
     <p:sldId id="815" r:id="rId8"/>
@@ -45,45 +45,51 @@
     <p:sldId id="718" r:id="rId35"/>
     <p:sldId id="719" r:id="rId36"/>
     <p:sldId id="720" r:id="rId37"/>
-    <p:sldId id="721" r:id="rId38"/>
-    <p:sldId id="710" r:id="rId39"/>
-    <p:sldId id="937" r:id="rId40"/>
-    <p:sldId id="389" r:id="rId41"/>
-    <p:sldId id="938" r:id="rId42"/>
-    <p:sldId id="673" r:id="rId43"/>
-    <p:sldId id="672" r:id="rId44"/>
-    <p:sldId id="358" r:id="rId45"/>
-    <p:sldId id="528" r:id="rId46"/>
-    <p:sldId id="529" r:id="rId47"/>
-    <p:sldId id="359" r:id="rId48"/>
-    <p:sldId id="401" r:id="rId49"/>
-    <p:sldId id="362" r:id="rId50"/>
-    <p:sldId id="356" r:id="rId51"/>
-    <p:sldId id="722" r:id="rId52"/>
-    <p:sldId id="709" r:id="rId53"/>
-    <p:sldId id="723" r:id="rId54"/>
-    <p:sldId id="724" r:id="rId55"/>
-    <p:sldId id="516" r:id="rId56"/>
-    <p:sldId id="517" r:id="rId57"/>
-    <p:sldId id="518" r:id="rId58"/>
-    <p:sldId id="523" r:id="rId59"/>
-    <p:sldId id="524" r:id="rId60"/>
-    <p:sldId id="367" r:id="rId61"/>
-    <p:sldId id="368" r:id="rId62"/>
-    <p:sldId id="369" r:id="rId63"/>
-    <p:sldId id="570" r:id="rId64"/>
-    <p:sldId id="571" r:id="rId65"/>
-    <p:sldId id="572" r:id="rId66"/>
-    <p:sldId id="573" r:id="rId67"/>
-    <p:sldId id="705" r:id="rId68"/>
-    <p:sldId id="706" r:id="rId69"/>
-    <p:sldId id="707" r:id="rId70"/>
-    <p:sldId id="708" r:id="rId71"/>
+    <p:sldId id="941" r:id="rId38"/>
+    <p:sldId id="942" r:id="rId39"/>
+    <p:sldId id="721" r:id="rId40"/>
+    <p:sldId id="710" r:id="rId41"/>
+    <p:sldId id="937" r:id="rId42"/>
+    <p:sldId id="389" r:id="rId43"/>
+    <p:sldId id="938" r:id="rId44"/>
+    <p:sldId id="673" r:id="rId45"/>
+    <p:sldId id="672" r:id="rId46"/>
+    <p:sldId id="358" r:id="rId47"/>
+    <p:sldId id="528" r:id="rId48"/>
+    <p:sldId id="529" r:id="rId49"/>
+    <p:sldId id="359" r:id="rId50"/>
+    <p:sldId id="401" r:id="rId51"/>
+    <p:sldId id="362" r:id="rId52"/>
+    <p:sldId id="356" r:id="rId53"/>
+    <p:sldId id="722" r:id="rId54"/>
+    <p:sldId id="709" r:id="rId55"/>
+    <p:sldId id="723" r:id="rId56"/>
+    <p:sldId id="724" r:id="rId57"/>
+    <p:sldId id="516" r:id="rId58"/>
+    <p:sldId id="517" r:id="rId59"/>
+    <p:sldId id="518" r:id="rId60"/>
+    <p:sldId id="523" r:id="rId61"/>
+    <p:sldId id="524" r:id="rId62"/>
+    <p:sldId id="367" r:id="rId63"/>
+    <p:sldId id="368" r:id="rId64"/>
+    <p:sldId id="369" r:id="rId65"/>
+    <p:sldId id="570" r:id="rId66"/>
+    <p:sldId id="571" r:id="rId67"/>
+    <p:sldId id="572" r:id="rId68"/>
+    <p:sldId id="573" r:id="rId69"/>
+    <p:sldId id="705" r:id="rId70"/>
+    <p:sldId id="706" r:id="rId71"/>
+    <p:sldId id="707" r:id="rId72"/>
+    <p:sldId id="708" r:id="rId73"/>
+    <p:sldId id="939" r:id="rId74"/>
+    <p:sldId id="940" r:id="rId75"/>
+    <p:sldId id="944" r:id="rId76"/>
+    <p:sldId id="945" r:id="rId77"/>
   </p:sldIdLst>
   <p:sldSz cx="12192000" cy="6858000"/>
   <p:notesSz cx="6858000" cy="9144000"/>
   <p:custDataLst>
-    <p:tags r:id="rId76"/>
+    <p:tags r:id="rId82"/>
   </p:custDataLst>
   <p:defaultTextStyle>
     <a:defPPr>
@@ -180,22 +186,6 @@
       </a:defRPr>
     </a:lvl9pPr>
   </p:defaultTextStyle>
-  <p:extLst>
-    <p:ext uri="{EFAFB233-063F-42B5-8137-9DF3F51BA10A}">
-      <p15:sldGuideLst xmlns:p15="http://schemas.microsoft.com/office/powerpoint/2012/main">
-        <p15:guide id="1" orient="horz" pos="2160" userDrawn="1">
-          <p15:clr>
-            <a:srgbClr val="A4A3A4"/>
-          </p15:clr>
-        </p15:guide>
-        <p15:guide id="2" pos="3840" userDrawn="1">
-          <p15:clr>
-            <a:srgbClr val="A4A3A4"/>
-          </p15:clr>
-        </p15:guide>
-      </p15:sldGuideLst>
-    </p:ext>
-  </p:extLst>
 </p:presentation>
 </file>
 
@@ -4003,10 +3993,15 @@
             <p:ph idx="1"/>
           </p:nvPr>
         </p:nvSpPr>
-        <p:spPr/>
+        <p:spPr>
+          <a:xfrm>
+            <a:off x="838200" y="1211580"/>
+            <a:ext cx="4928870" cy="4549140"/>
+          </a:xfrm>
+        </p:spPr>
         <p:txBody>
           <a:bodyPr>
-            <a:normAutofit lnSpcReduction="10000"/>
+            <a:normAutofit fontScale="70000"/>
           </a:bodyPr>
           <a:p>
             <a:r>
@@ -4110,6 +4105,282 @@
               <a:t>ClientAliveInterval	// number of seconds that the server will wait before sending a null packet to the client (to keep the connection alive).</a:t>
             </a:r>
             <a:endParaRPr lang="en-US" altLang="zh-CN"/>
+          </a:p>
+        </p:txBody>
+      </p:sp>
+      <p:sp>
+        <p:nvSpPr>
+          <p:cNvPr id="4" name="内容占位符 2"/>
+          <p:cNvSpPr>
+            <a:spLocks noGrp="1"/>
+          </p:cNvSpPr>
+          <p:nvPr/>
+        </p:nvSpPr>
+        <p:spPr>
+          <a:xfrm>
+            <a:off x="6424930" y="1211580"/>
+            <a:ext cx="4928870" cy="4549140"/>
+          </a:xfrm>
+          <a:prstGeom prst="rect">
+            <a:avLst/>
+          </a:prstGeom>
+        </p:spPr>
+        <p:txBody>
+          <a:bodyPr vert="horz" lIns="91440" tIns="45720" rIns="91440" bIns="45720" rtlCol="0"/>
+          <a:lstStyle>
+            <a:lvl1pPr marL="342900" indent="-342900" algn="l" defTabSz="914400" rtl="0" eaLnBrk="1" latinLnBrk="0" hangingPunct="1">
+              <a:lnSpc>
+                <a:spcPct val="90000"/>
+              </a:lnSpc>
+              <a:spcBef>
+                <a:spcPts val="1000"/>
+              </a:spcBef>
+              <a:buFont typeface="黑体" panose="02010609060101010101" charset="-122"/>
+              <a:buChar char="〉"/>
+              <a:defRPr sz="2400" kern="1200">
+                <a:solidFill>
+                  <a:schemeClr val="tx1"/>
+                </a:solidFill>
+                <a:latin typeface="+mn-lt"/>
+                <a:ea typeface="+mn-ea"/>
+                <a:cs typeface="+mn-cs"/>
+              </a:defRPr>
+            </a:lvl1pPr>
+            <a:lvl2pPr marL="800100" indent="-342900" algn="l" defTabSz="914400" rtl="0" eaLnBrk="1" latinLnBrk="0" hangingPunct="1">
+              <a:lnSpc>
+                <a:spcPct val="90000"/>
+              </a:lnSpc>
+              <a:spcBef>
+                <a:spcPts val="500"/>
+              </a:spcBef>
+              <a:buFont typeface="Arial" panose="020B0604020202020204" pitchFamily="34" charset="0"/>
+              <a:buChar char="•"/>
+              <a:defRPr sz="2000" kern="1200">
+                <a:solidFill>
+                  <a:schemeClr val="tx1"/>
+                </a:solidFill>
+                <a:latin typeface="+mn-lt"/>
+                <a:ea typeface="+mn-ea"/>
+                <a:cs typeface="+mn-cs"/>
+              </a:defRPr>
+            </a:lvl2pPr>
+            <a:lvl3pPr marL="1257300" indent="-342900" algn="l" defTabSz="914400" rtl="0" eaLnBrk="1" latinLnBrk="0" hangingPunct="1">
+              <a:lnSpc>
+                <a:spcPct val="90000"/>
+              </a:lnSpc>
+              <a:spcBef>
+                <a:spcPts val="500"/>
+              </a:spcBef>
+              <a:buFont typeface="Arial" panose="020B0604020202020204" pitchFamily="34" charset="0"/>
+              <a:buChar char="•"/>
+              <a:defRPr sz="1800" kern="1200">
+                <a:solidFill>
+                  <a:schemeClr val="tx1"/>
+                </a:solidFill>
+                <a:latin typeface="+mn-lt"/>
+                <a:ea typeface="+mn-ea"/>
+                <a:cs typeface="+mn-cs"/>
+              </a:defRPr>
+            </a:lvl3pPr>
+            <a:lvl4pPr marL="1657350" indent="-285750" algn="l" defTabSz="914400" rtl="0" eaLnBrk="1" latinLnBrk="0" hangingPunct="1">
+              <a:lnSpc>
+                <a:spcPct val="90000"/>
+              </a:lnSpc>
+              <a:spcBef>
+                <a:spcPts val="500"/>
+              </a:spcBef>
+              <a:buFont typeface="Arial" panose="020B0604020202020204" pitchFamily="34" charset="0"/>
+              <a:buChar char="•"/>
+              <a:defRPr sz="1800" kern="1200">
+                <a:solidFill>
+                  <a:schemeClr val="tx1"/>
+                </a:solidFill>
+                <a:latin typeface="+mn-lt"/>
+                <a:ea typeface="+mn-ea"/>
+                <a:cs typeface="+mn-cs"/>
+              </a:defRPr>
+            </a:lvl4pPr>
+            <a:lvl5pPr marL="2114550" indent="-285750" algn="l" defTabSz="914400" rtl="0" eaLnBrk="1" latinLnBrk="0" hangingPunct="1">
+              <a:lnSpc>
+                <a:spcPct val="90000"/>
+              </a:lnSpc>
+              <a:spcBef>
+                <a:spcPts val="500"/>
+              </a:spcBef>
+              <a:buFont typeface="Arial" panose="020B0604020202020204" pitchFamily="34" charset="0"/>
+              <a:buChar char="•"/>
+              <a:defRPr sz="1800" kern="1200">
+                <a:solidFill>
+                  <a:schemeClr val="tx1"/>
+                </a:solidFill>
+                <a:latin typeface="+mn-lt"/>
+                <a:ea typeface="+mn-ea"/>
+                <a:cs typeface="+mn-cs"/>
+              </a:defRPr>
+            </a:lvl5pPr>
+            <a:lvl6pPr marL="2514600" indent="-228600" algn="l" defTabSz="914400" rtl="0" eaLnBrk="1" latinLnBrk="0" hangingPunct="1">
+              <a:lnSpc>
+                <a:spcPct val="90000"/>
+              </a:lnSpc>
+              <a:spcBef>
+                <a:spcPts val="500"/>
+              </a:spcBef>
+              <a:buFont typeface="Arial" panose="020B0604020202020204" pitchFamily="34" charset="0"/>
+              <a:buChar char="•"/>
+              <a:defRPr sz="1800" kern="1200">
+                <a:solidFill>
+                  <a:schemeClr val="tx1"/>
+                </a:solidFill>
+                <a:latin typeface="+mn-lt"/>
+                <a:ea typeface="+mn-ea"/>
+                <a:cs typeface="+mn-cs"/>
+              </a:defRPr>
+            </a:lvl6pPr>
+            <a:lvl7pPr marL="2971800" indent="-228600" algn="l" defTabSz="914400" rtl="0" eaLnBrk="1" latinLnBrk="0" hangingPunct="1">
+              <a:lnSpc>
+                <a:spcPct val="90000"/>
+              </a:lnSpc>
+              <a:spcBef>
+                <a:spcPts val="500"/>
+              </a:spcBef>
+              <a:buFont typeface="Arial" panose="020B0604020202020204" pitchFamily="34" charset="0"/>
+              <a:buChar char="•"/>
+              <a:defRPr sz="1800" kern="1200">
+                <a:solidFill>
+                  <a:schemeClr val="tx1"/>
+                </a:solidFill>
+                <a:latin typeface="+mn-lt"/>
+                <a:ea typeface="+mn-ea"/>
+                <a:cs typeface="+mn-cs"/>
+              </a:defRPr>
+            </a:lvl7pPr>
+            <a:lvl8pPr marL="3429000" indent="-228600" algn="l" defTabSz="914400" rtl="0" eaLnBrk="1" latinLnBrk="0" hangingPunct="1">
+              <a:lnSpc>
+                <a:spcPct val="90000"/>
+              </a:lnSpc>
+              <a:spcBef>
+                <a:spcPts val="500"/>
+              </a:spcBef>
+              <a:buFont typeface="Arial" panose="020B0604020202020204" pitchFamily="34" charset="0"/>
+              <a:buChar char="•"/>
+              <a:defRPr sz="1800" kern="1200">
+                <a:solidFill>
+                  <a:schemeClr val="tx1"/>
+                </a:solidFill>
+                <a:latin typeface="+mn-lt"/>
+                <a:ea typeface="+mn-ea"/>
+                <a:cs typeface="+mn-cs"/>
+              </a:defRPr>
+            </a:lvl8pPr>
+            <a:lvl9pPr marL="3886200" indent="-228600" algn="l" defTabSz="914400" rtl="0" eaLnBrk="1" latinLnBrk="0" hangingPunct="1">
+              <a:lnSpc>
+                <a:spcPct val="90000"/>
+              </a:lnSpc>
+              <a:spcBef>
+                <a:spcPts val="500"/>
+              </a:spcBef>
+              <a:buFont typeface="Arial" panose="020B0604020202020204" pitchFamily="34" charset="0"/>
+              <a:buChar char="•"/>
+              <a:defRPr sz="1800" kern="1200">
+                <a:solidFill>
+                  <a:schemeClr val="tx1"/>
+                </a:solidFill>
+                <a:latin typeface="+mn-lt"/>
+                <a:ea typeface="+mn-ea"/>
+                <a:cs typeface="+mn-cs"/>
+              </a:defRPr>
+            </a:lvl9pPr>
+          </a:lstStyle>
+          <a:p>
+            <a:r>
+              <a:rPr lang="en-US" altLang="zh-CN" sz="1800"/>
+              <a:t>Store keys to avoid password input each time</a:t>
+            </a:r>
+            <a:endParaRPr lang="en-US" altLang="zh-CN" sz="1800"/>
+          </a:p>
+          <a:p>
+            <a:pPr lvl="1"/>
+            <a:r>
+              <a:rPr lang="en-US" altLang="zh-CN" sz="1500"/>
+              <a:t>generate public/private key pair</a:t>
+            </a:r>
+            <a:endParaRPr lang="en-US" altLang="zh-CN" sz="1500"/>
+          </a:p>
+          <a:p>
+            <a:pPr lvl="2"/>
+            <a:r>
+              <a:rPr lang="en-US" altLang="zh-CN" sz="1350"/>
+              <a:t>ssh-keygen -t rsa -b 4096 -C "telegram-be-deploy"</a:t>
+            </a:r>
+            <a:endParaRPr lang="en-US" altLang="zh-CN" sz="1350"/>
+          </a:p>
+          <a:p>
+            <a:pPr lvl="3"/>
+            <a:r>
+              <a:rPr lang="en-US" altLang="zh-CN" sz="1350"/>
+              <a:t>-t: type</a:t>
+            </a:r>
+            <a:endParaRPr lang="en-US" altLang="zh-CN" sz="1350"/>
+          </a:p>
+          <a:p>
+            <a:pPr lvl="3"/>
+            <a:r>
+              <a:rPr lang="en-US" altLang="zh-CN" sz="1350"/>
+              <a:t>-b: number of bits in the key to create</a:t>
+            </a:r>
+            <a:endParaRPr lang="en-US" altLang="zh-CN" sz="1350"/>
+          </a:p>
+          <a:p>
+            <a:pPr lvl="3"/>
+            <a:r>
+              <a:rPr lang="en-US" altLang="zh-CN" sz="1350"/>
+              <a:t>-C: comment</a:t>
+            </a:r>
+            <a:endParaRPr lang="en-US" altLang="zh-CN" sz="1350"/>
+          </a:p>
+          <a:p>
+            <a:pPr lvl="3"/>
+            <a:r>
+              <a:rPr lang="en-US" altLang="zh-CN" sz="1350"/>
+              <a:t>generated into ~/.ssh folder</a:t>
+            </a:r>
+            <a:endParaRPr lang="en-US" altLang="zh-CN" sz="1350"/>
+          </a:p>
+          <a:p>
+            <a:pPr lvl="1"/>
+            <a:r>
+              <a:rPr lang="en-US" altLang="zh-CN" sz="1500">
+                <a:sym typeface="+mn-ea"/>
+              </a:rPr>
+              <a:t>copy public key to remote server</a:t>
+            </a:r>
+            <a:endParaRPr lang="en-US" altLang="zh-CN" sz="1500">
+              <a:sym typeface="+mn-ea"/>
+            </a:endParaRPr>
+          </a:p>
+          <a:p>
+            <a:pPr lvl="2"/>
+            <a:r>
+              <a:rPr lang="en-US" altLang="zh-CN" sz="1350"/>
+              <a:t>ssh-copy-id -p 22 root@your-server-ip</a:t>
+            </a:r>
+            <a:endParaRPr lang="en-US" altLang="zh-CN" sz="1350"/>
+          </a:p>
+          <a:p>
+            <a:pPr lvl="0"/>
+            <a:r>
+              <a:rPr lang="en-US" altLang="zh-CN" sz="1800"/>
+              <a:t>Generate secret keys</a:t>
+            </a:r>
+            <a:endParaRPr lang="en-US" altLang="zh-CN" sz="1800"/>
+          </a:p>
+          <a:p>
+            <a:pPr lvl="1"/>
+            <a:r>
+              <a:rPr lang="en-US" altLang="zh-CN" sz="1500"/>
+              <a:t>python -c 'import secrets; print(secrets.token_hex(32))'</a:t>
+            </a:r>
+            <a:endParaRPr lang="en-US" altLang="zh-CN" sz="1500"/>
           </a:p>
         </p:txBody>
       </p:sp>
@@ -9466,11 +9737,13 @@
         </p:nvSpPr>
         <p:spPr/>
         <p:txBody>
-          <a:bodyPr/>
+          <a:bodyPr>
+            <a:normAutofit lnSpcReduction="20000"/>
+          </a:bodyPr>
           <a:p>
             <a:r>
               <a:rPr lang="en-US" altLang="zh-CN">
-                <a:hlinkClick r:id="rId1" tooltip="" action="ppaction://hlinksldjump"/>
+                <a:hlinkClick r:id="rId1" action="ppaction://hlinksldjump"/>
               </a:rPr>
               <a:t>General</a:t>
             </a:r>
@@ -9479,7 +9752,7 @@
           <a:p>
             <a:r>
               <a:rPr lang="en-US" altLang="zh-CN">
-                <a:hlinkClick r:id="rId2" tooltip="" action="ppaction://hlinksldjump"/>
+                <a:hlinkClick r:id="rId2" action="ppaction://hlinksldjump"/>
               </a:rPr>
               <a:t>SSL &amp; Certificate</a:t>
             </a:r>
@@ -9488,7 +9761,7 @@
           <a:p>
             <a:r>
               <a:rPr lang="en-US" altLang="zh-CN">
-                <a:hlinkClick r:id="rId3" tooltip="" action="ppaction://hlinksldjump"/>
+                <a:hlinkClick r:id="rId3" action="ppaction://hlinksldjump"/>
               </a:rPr>
               <a:t>Windows Server</a:t>
             </a:r>
@@ -9497,7 +9770,7 @@
           <a:p>
             <a:r>
               <a:rPr lang="en-US" altLang="zh-CN">
-                <a:hlinkClick r:id="rId4" tooltip="" action="ppaction://hlinksldjump"/>
+                <a:hlinkClick r:id="rId4" action="ppaction://hlinksldjump"/>
               </a:rPr>
               <a:t>Zabbix</a:t>
             </a:r>
@@ -9506,7 +9779,7 @@
           <a:p>
             <a:r>
               <a:rPr lang="en-US" altLang="zh-CN">
-                <a:hlinkClick r:id="rId5" tooltip="" action="ppaction://hlinksldjump"/>
+                <a:hlinkClick r:id="rId5" action="ppaction://hlinksldjump"/>
               </a:rPr>
               <a:t>AWS</a:t>
             </a:r>
@@ -9515,16 +9788,16 @@
           <a:p>
             <a:r>
               <a:rPr lang="en-US" altLang="zh-CN">
-                <a:hlinkClick r:id="rId5" tooltip="" action="ppaction://hlinksldjump"/>
+                <a:hlinkClick r:id="rId6" action="ppaction://hlinksldjump"/>
               </a:rPr>
-              <a:t>Baas</a:t>
+              <a:t>BaaS</a:t>
             </a:r>
             <a:endParaRPr lang="en-US" altLang="zh-CN"/>
           </a:p>
           <a:p>
             <a:r>
               <a:rPr lang="en-US" altLang="zh-CN">
-                <a:hlinkClick r:id="rId6" tooltip="" action="ppaction://hlinksldjump"/>
+                <a:hlinkClick r:id="rId7" action="ppaction://hlinksldjump"/>
               </a:rPr>
               <a:t>API Testing</a:t>
             </a:r>
@@ -9533,7 +9806,7 @@
           <a:p>
             <a:r>
               <a:rPr lang="en-US" altLang="zh-CN">
-                <a:hlinkClick r:id="rId7" tooltip="" action="ppaction://hlinksldjump"/>
+                <a:hlinkClick r:id="rId8" action="ppaction://hlinksldjump"/>
               </a:rPr>
               <a:t>CMS</a:t>
             </a:r>
@@ -9542,9 +9815,29 @@
           <a:p>
             <a:r>
               <a:rPr lang="en-US" altLang="zh-CN">
-                <a:hlinkClick r:id="rId8" tooltip="" action="ppaction://hlinksldjump"/>
+                <a:hlinkClick r:id="rId9" action="ppaction://hlinksldjump"/>
               </a:rPr>
               <a:t>Docker</a:t>
+            </a:r>
+            <a:endParaRPr lang="en-US" altLang="zh-CN"/>
+          </a:p>
+          <a:p>
+            <a:r>
+              <a:rPr lang="en-US" altLang="zh-CN">
+                <a:hlinkClick r:id="rId10" action="ppaction://hlinksldjump"/>
+              </a:rPr>
+              <a:t>Statistics</a:t>
+            </a:r>
+            <a:endParaRPr lang="en-US" altLang="zh-CN">
+              <a:hlinkClick r:id="rId10" action="ppaction://hlinksldjump"/>
+            </a:endParaRPr>
+          </a:p>
+          <a:p>
+            <a:r>
+              <a:rPr lang="en-US" altLang="zh-CN">
+                <a:hlinkClick r:id="rId11" tooltip="" action="ppaction://hlinksldjump"/>
+              </a:rPr>
+              <a:t>Security</a:t>
             </a:r>
             <a:endParaRPr lang="en-US" altLang="zh-CN"/>
           </a:p>
@@ -9552,7 +9845,7 @@
       </p:sp>
     </p:spTree>
     <p:custDataLst>
-      <p:tags r:id="rId9"/>
+      <p:tags r:id="rId12"/>
     </p:custDataLst>
   </p:cSld>
   <p:clrMapOvr>
@@ -10743,7 +11036,7 @@
         <p:spPr/>
         <p:txBody>
           <a:bodyPr>
-            <a:normAutofit lnSpcReduction="20000"/>
+            <a:normAutofit fontScale="90000" lnSpcReduction="20000"/>
           </a:bodyPr>
           <a:p>
             <a:r>
@@ -10844,6 +11137,42 @@
             <a:pPr lvl="1"/>
             <a:r>
               <a:rPr lang="en-US" altLang="zh-CN"/>
+              <a:t>sudo fdisk -l  # </a:t>
+            </a:r>
+            <a:r>
+              <a:rPr lang="zh-CN" altLang="en-US"/>
+              <a:t>查看是否</a:t>
+            </a:r>
+            <a:r>
+              <a:rPr lang="en-US" altLang="zh-CN"/>
+              <a:t>gpt</a:t>
+            </a:r>
+            <a:r>
+              <a:rPr lang="zh-CN" altLang="en-US"/>
+              <a:t>分区</a:t>
+            </a:r>
+            <a:endParaRPr lang="zh-CN" altLang="en-US"/>
+          </a:p>
+          <a:p>
+            <a:pPr lvl="1"/>
+            <a:r>
+              <a:rPr lang="en-US" altLang="zh-CN"/>
+              <a:t>sudo file -s /dev/vda2   # </a:t>
+            </a:r>
+            <a:r>
+              <a:rPr lang="zh-CN" altLang="en-US"/>
+              <a:t>查看文件系统是否为</a:t>
+            </a:r>
+            <a:r>
+              <a:rPr lang="en-US" altLang="zh-CN"/>
+              <a:t>ext4</a:t>
+            </a:r>
+            <a:endParaRPr lang="zh-CN" altLang="en-US"/>
+          </a:p>
+          <a:p>
+            <a:pPr lvl="1"/>
+            <a:r>
+              <a:rPr lang="en-US" altLang="zh-CN"/>
               <a:t>sudo apt install -y gdisk cloud-guest-utils</a:t>
             </a:r>
             <a:endParaRPr lang="en-US" altLang="zh-CN"/>
@@ -10853,6 +11182,14 @@
             <a:r>
               <a:rPr lang="en-US" altLang="zh-CN"/>
               <a:t>sudo LC_ALL=en_US.UTF-8 growpart /dev/vda 2</a:t>
+            </a:r>
+            <a:endParaRPr lang="en-US" altLang="zh-CN"/>
+          </a:p>
+          <a:p>
+            <a:pPr lvl="1"/>
+            <a:r>
+              <a:rPr lang="en-US" altLang="zh-CN"/>
+              <a:t>resize2fs /dev/vda2</a:t>
             </a:r>
             <a:endParaRPr lang="en-US" altLang="zh-CN"/>
           </a:p>
@@ -10964,6 +11301,389 @@
           <a:p>
             <a:r>
               <a:rPr lang="en-US" altLang="zh-CN"/>
+              <a:t>Log Rotate</a:t>
+            </a:r>
+            <a:endParaRPr lang="en-US" altLang="zh-CN"/>
+          </a:p>
+        </p:txBody>
+      </p:sp>
+      <p:sp>
+        <p:nvSpPr>
+          <p:cNvPr id="3" name="内容占位符 2"/>
+          <p:cNvSpPr>
+            <a:spLocks noGrp="1"/>
+          </p:cNvSpPr>
+          <p:nvPr>
+            <p:ph idx="1"/>
+          </p:nvPr>
+        </p:nvSpPr>
+        <p:spPr>
+          <a:xfrm>
+            <a:off x="838200" y="1211580"/>
+            <a:ext cx="4846320" cy="4549140"/>
+          </a:xfrm>
+        </p:spPr>
+        <p:txBody>
+          <a:bodyPr/>
+          <a:p>
+            <a:r>
+              <a:rPr lang="en-US" altLang="zh-CN"/>
+              <a:t>/etc/logrotate.d/nginx-docker</a:t>
+            </a:r>
+            <a:endParaRPr lang="en-US" altLang="zh-CN"/>
+          </a:p>
+          <a:p>
+            <a:pPr lvl="1"/>
+            <a:r>
+              <a:rPr lang="en-US" altLang="zh-CN"/>
+              <a:t>dry run</a:t>
+            </a:r>
+            <a:endParaRPr lang="en-US" altLang="zh-CN"/>
+          </a:p>
+          <a:p>
+            <a:pPr lvl="2"/>
+            <a:r>
+              <a:rPr lang="en-US" altLang="zh-CN"/>
+              <a:t>sudo logrotate -d /etc/logrotate.d/nginx-docker</a:t>
+            </a:r>
+            <a:endParaRPr lang="en-US" altLang="zh-CN"/>
+          </a:p>
+          <a:p>
+            <a:pPr lvl="1"/>
+            <a:r>
+              <a:rPr lang="en-US" altLang="zh-CN"/>
+              <a:t>force rotation</a:t>
+            </a:r>
+            <a:endParaRPr lang="en-US" altLang="zh-CN"/>
+          </a:p>
+          <a:p>
+            <a:pPr lvl="2"/>
+            <a:r>
+              <a:rPr lang="en-US" altLang="zh-CN"/>
+              <a:t>sudo logrotate -f /etc/logrotate.d/nginx-docker</a:t>
+            </a:r>
+            <a:endParaRPr lang="en-US" altLang="zh-CN"/>
+          </a:p>
+          <a:p>
+            <a:pPr lvl="1"/>
+            <a:r>
+              <a:rPr lang="en-US" altLang="zh-CN"/>
+              <a:t>/etc/cron.daily/logrotate</a:t>
+            </a:r>
+            <a:endParaRPr lang="en-US" altLang="zh-CN"/>
+          </a:p>
+          <a:p>
+            <a:pPr lvl="1"/>
+            <a:endParaRPr lang="en-US" altLang="zh-CN"/>
+          </a:p>
+        </p:txBody>
+      </p:sp>
+      <p:sp>
+        <p:nvSpPr>
+          <p:cNvPr id="4" name="文本框 3"/>
+          <p:cNvSpPr txBox="1"/>
+          <p:nvPr/>
+        </p:nvSpPr>
+        <p:spPr>
+          <a:xfrm>
+            <a:off x="6918960" y="1349375"/>
+            <a:ext cx="4419600" cy="4184650"/>
+          </a:xfrm>
+          <a:prstGeom prst="rect">
+            <a:avLst/>
+          </a:prstGeom>
+          <a:noFill/>
+          <a:ln>
+            <a:solidFill>
+              <a:srgbClr val="C00000"/>
+            </a:solidFill>
+          </a:ln>
+        </p:spPr>
+        <p:txBody>
+          <a:bodyPr wrap="square" rtlCol="0">
+            <a:spAutoFit/>
+          </a:bodyPr>
+          <a:p>
+            <a:r>
+              <a:rPr lang="en-US" altLang="zh-CN" sz="1400"/>
+              <a:t>/data/PanoService/log/*.log {</a:t>
+            </a:r>
+            <a:endParaRPr lang="en-US" altLang="zh-CN" sz="1400"/>
+          </a:p>
+          <a:p>
+            <a:r>
+              <a:rPr lang="en-US" altLang="zh-CN" sz="1400"/>
+              <a:t>    daily</a:t>
+            </a:r>
+            <a:endParaRPr lang="en-US" altLang="zh-CN" sz="1400"/>
+          </a:p>
+          <a:p>
+            <a:r>
+              <a:rPr lang="en-US" altLang="zh-CN" sz="1400"/>
+              <a:t>    missingok</a:t>
+            </a:r>
+            <a:endParaRPr lang="en-US" altLang="zh-CN" sz="1400"/>
+          </a:p>
+          <a:p>
+            <a:r>
+              <a:rPr lang="en-US" altLang="zh-CN" sz="1400"/>
+              <a:t>    rotate 14</a:t>
+            </a:r>
+            <a:endParaRPr lang="en-US" altLang="zh-CN" sz="1400"/>
+          </a:p>
+          <a:p>
+            <a:r>
+              <a:rPr lang="en-US" altLang="zh-CN" sz="1400"/>
+              <a:t>    compress   </a:t>
+            </a:r>
+            <a:endParaRPr lang="en-US" altLang="zh-CN" sz="1400"/>
+          </a:p>
+          <a:p>
+            <a:r>
+              <a:rPr lang="en-US" altLang="zh-CN" sz="1400"/>
+              <a:t>    delaycompress</a:t>
+            </a:r>
+            <a:endParaRPr lang="en-US" altLang="zh-CN" sz="1400"/>
+          </a:p>
+          <a:p>
+            <a:r>
+              <a:rPr lang="en-US" altLang="zh-CN" sz="1400"/>
+              <a:t>    notifempty</a:t>
+            </a:r>
+            <a:endParaRPr lang="en-US" altLang="zh-CN" sz="1400"/>
+          </a:p>
+          <a:p>
+            <a:r>
+              <a:rPr lang="en-US" altLang="zh-CN" sz="1400"/>
+              <a:t>    create 0640 root root</a:t>
+            </a:r>
+            <a:endParaRPr lang="en-US" altLang="zh-CN" sz="1400"/>
+          </a:p>
+          <a:p>
+            <a:r>
+              <a:rPr lang="en-US" altLang="zh-CN" sz="1400"/>
+              <a:t>    sharedscripts</a:t>
+            </a:r>
+            <a:endParaRPr lang="en-US" altLang="zh-CN" sz="1400"/>
+          </a:p>
+          <a:p>
+            <a:r>
+              <a:rPr lang="en-US" altLang="zh-CN" sz="1400"/>
+              <a:t>    postrotate</a:t>
+            </a:r>
+            <a:endParaRPr lang="en-US" altLang="zh-CN" sz="1400"/>
+          </a:p>
+          <a:p>
+            <a:r>
+              <a:rPr lang="en-US" altLang="zh-CN" sz="1400"/>
+              <a:t>         docker exec nginx-container-name nginx -s reload</a:t>
+            </a:r>
+            <a:endParaRPr lang="en-US" altLang="zh-CN" sz="1400"/>
+          </a:p>
+          <a:p>
+            <a:pPr indent="457200"/>
+            <a:r>
+              <a:rPr lang="en-US" altLang="zh-CN" sz="1400"/>
+              <a:t> BACKUP_PATH="/home/ubuntu/Backup/logs/nginx/$(date +%Y-%m)"</a:t>
+            </a:r>
+            <a:endParaRPr lang="en-US" altLang="zh-CN" sz="1400"/>
+          </a:p>
+          <a:p>
+            <a:pPr indent="457200"/>
+            <a:r>
+              <a:rPr lang="en-US" altLang="zh-CN" sz="1400"/>
+              <a:t>mkdir -p "$BACKUP_PATH"</a:t>
+            </a:r>
+            <a:endParaRPr lang="en-US" altLang="zh-CN" sz="1400"/>
+          </a:p>
+          <a:p>
+            <a:r>
+              <a:rPr lang="en-US" altLang="zh-CN" sz="1400"/>
+              <a:t>         find /data/PanoService/log/ -name "*.gz" -mtime -1 -exec cp {} "$BACKUP_PATH" \;    endscript</a:t>
+            </a:r>
+            <a:endParaRPr lang="en-US" altLang="zh-CN" sz="1400"/>
+          </a:p>
+          <a:p>
+            <a:r>
+              <a:rPr lang="en-US" altLang="zh-CN" sz="1400"/>
+              <a:t>}</a:t>
+            </a:r>
+            <a:endParaRPr lang="en-US" altLang="zh-CN" sz="1400"/>
+          </a:p>
+        </p:txBody>
+      </p:sp>
+    </p:spTree>
+    <p:custDataLst>
+      <p:tags r:id="rId1"/>
+    </p:custDataLst>
+  </p:cSld>
+  <p:clrMapOvr>
+    <a:masterClrMapping/>
+  </p:clrMapOvr>
+</p:sld>
+</file>
+
+<file path=ppt/slides/slide36.xml><?xml version="1.0" encoding="utf-8"?>
+<p:sld xmlns:a="http://schemas.openxmlformats.org/drawingml/2006/main" xmlns:r="http://schemas.openxmlformats.org/officeDocument/2006/relationships" xmlns:p="http://schemas.openxmlformats.org/presentationml/2006/main">
+  <p:cSld>
+    <p:spTree>
+      <p:nvGrpSpPr>
+        <p:cNvPr id="1" name=""/>
+        <p:cNvGrpSpPr/>
+        <p:nvPr/>
+      </p:nvGrpSpPr>
+      <p:grpSpPr/>
+      <p:sp>
+        <p:nvSpPr>
+          <p:cNvPr id="2" name="标题 1"/>
+          <p:cNvSpPr>
+            <a:spLocks noGrp="1"/>
+          </p:cNvSpPr>
+          <p:nvPr>
+            <p:ph type="title"/>
+          </p:nvPr>
+        </p:nvSpPr>
+        <p:spPr/>
+        <p:txBody>
+          <a:bodyPr>
+            <a:normAutofit/>
+          </a:bodyPr>
+          <a:p>
+            <a:r>
+              <a:rPr lang="en-US" altLang="zh-CN"/>
+              <a:t>Move to New Server</a:t>
+            </a:r>
+            <a:endParaRPr lang="en-US" altLang="zh-CN"/>
+          </a:p>
+        </p:txBody>
+      </p:sp>
+      <p:sp>
+        <p:nvSpPr>
+          <p:cNvPr id="3" name="内容占位符 2"/>
+          <p:cNvSpPr>
+            <a:spLocks noGrp="1"/>
+          </p:cNvSpPr>
+          <p:nvPr>
+            <p:ph idx="1"/>
+          </p:nvPr>
+        </p:nvSpPr>
+        <p:spPr/>
+        <p:txBody>
+          <a:bodyPr/>
+          <a:p>
+            <a:r>
+              <a:rPr lang="en-US" altLang="zh-CN"/>
+              <a:t>Backup DB on old server</a:t>
+            </a:r>
+            <a:endParaRPr lang="en-US" altLang="zh-CN"/>
+          </a:p>
+          <a:p>
+            <a:r>
+              <a:rPr lang="en-US" altLang="zh-CN"/>
+              <a:t>Backup user data on old server</a:t>
+            </a:r>
+            <a:endParaRPr lang="en-US" altLang="zh-CN"/>
+          </a:p>
+          <a:p>
+            <a:r>
+              <a:rPr lang="en-US" altLang="zh-CN"/>
+              <a:t>Install docker environment (Linux-bootstrap)</a:t>
+            </a:r>
+            <a:endParaRPr lang="en-US" altLang="zh-CN"/>
+          </a:p>
+          <a:p>
+            <a:r>
+              <a:rPr lang="en-US" altLang="zh-CN"/>
+              <a:t>Deploy services onto new server</a:t>
+            </a:r>
+            <a:endParaRPr lang="en-US" altLang="zh-CN"/>
+          </a:p>
+          <a:p>
+            <a:r>
+              <a:rPr lang="en-US" altLang="zh-CN"/>
+              <a:t>Copy user data to new server</a:t>
+            </a:r>
+            <a:endParaRPr lang="en-US" altLang="zh-CN"/>
+          </a:p>
+          <a:p>
+            <a:r>
+              <a:rPr lang="en-US" altLang="zh-CN"/>
+              <a:t>Import DB in new server</a:t>
+            </a:r>
+            <a:endParaRPr lang="en-US" altLang="zh-CN"/>
+          </a:p>
+          <a:p>
+            <a:r>
+              <a:rPr lang="en-US" altLang="zh-CN"/>
+              <a:t>“crontab -e” to set up maintenance tasks</a:t>
+            </a:r>
+            <a:endParaRPr lang="en-US" altLang="zh-CN"/>
+          </a:p>
+          <a:p>
+            <a:pPr lvl="1"/>
+            <a:r>
+              <a:rPr lang="en-US" altLang="zh-CN" sz="2000"/>
+              <a:t>backup_docker_logs.sh</a:t>
+            </a:r>
+            <a:endParaRPr lang="en-US" altLang="zh-CN"/>
+          </a:p>
+          <a:p>
+            <a:r>
+              <a:rPr lang="en-US" altLang="zh-CN"/>
+              <a:t>Copy nginx-docker to /etc/logrotate.d/</a:t>
+            </a:r>
+            <a:endParaRPr lang="en-US" altLang="zh-CN"/>
+          </a:p>
+          <a:p>
+            <a:pPr lvl="1"/>
+            <a:r>
+              <a:rPr lang="en-US" altLang="zh-CN"/>
+              <a:t>for nginx log rotation</a:t>
+            </a:r>
+            <a:endParaRPr lang="en-US" altLang="zh-CN"/>
+          </a:p>
+          <a:p>
+            <a:endParaRPr lang="en-US" altLang="zh-CN"/>
+          </a:p>
+        </p:txBody>
+      </p:sp>
+    </p:spTree>
+    <p:custDataLst>
+      <p:tags r:id="rId1"/>
+    </p:custDataLst>
+  </p:cSld>
+  <p:clrMapOvr>
+    <a:masterClrMapping/>
+  </p:clrMapOvr>
+</p:sld>
+</file>
+
+<file path=ppt/slides/slide37.xml><?xml version="1.0" encoding="utf-8"?>
+<p:sld xmlns:a="http://schemas.openxmlformats.org/drawingml/2006/main" xmlns:r="http://schemas.openxmlformats.org/officeDocument/2006/relationships" xmlns:p="http://schemas.openxmlformats.org/presentationml/2006/main">
+  <p:cSld>
+    <p:spTree>
+      <p:nvGrpSpPr>
+        <p:cNvPr id="1" name=""/>
+        <p:cNvGrpSpPr/>
+        <p:nvPr/>
+      </p:nvGrpSpPr>
+      <p:grpSpPr/>
+      <p:sp>
+        <p:nvSpPr>
+          <p:cNvPr id="2" name="标题 1"/>
+          <p:cNvSpPr>
+            <a:spLocks noGrp="1"/>
+          </p:cNvSpPr>
+          <p:nvPr>
+            <p:ph type="title"/>
+          </p:nvPr>
+        </p:nvSpPr>
+        <p:spPr/>
+        <p:txBody>
+          <a:bodyPr/>
+          <a:p>
+            <a:r>
+              <a:rPr lang="en-US" altLang="zh-CN"/>
               <a:t>Q&amp;A</a:t>
             </a:r>
             <a:endParaRPr lang="en-US" altLang="zh-CN"/>
@@ -11156,7 +11876,7 @@
 </p:sld>
 </file>
 
-<file path=ppt/slides/slide36.xml><?xml version="1.0" encoding="utf-8"?>
+<file path=ppt/slides/slide38.xml><?xml version="1.0" encoding="utf-8"?>
 <p:sld xmlns:a="http://schemas.openxmlformats.org/drawingml/2006/main" xmlns:r="http://schemas.openxmlformats.org/officeDocument/2006/relationships" xmlns:p="http://schemas.openxmlformats.org/presentationml/2006/main">
   <p:cSld>
     <p:spTree>
@@ -11217,7 +11937,7 @@
 </p:sld>
 </file>
 
-<file path=ppt/slides/slide37.xml><?xml version="1.0" encoding="utf-8"?>
+<file path=ppt/slides/slide39.xml><?xml version="1.0" encoding="utf-8"?>
 <p:sld xmlns:a="http://schemas.openxmlformats.org/drawingml/2006/main" xmlns:r="http://schemas.openxmlformats.org/officeDocument/2006/relationships" xmlns:p="http://schemas.openxmlformats.org/presentationml/2006/main">
   <p:cSld>
     <p:spTree>
@@ -11437,7 +12157,68 @@
 </p:sld>
 </file>
 
-<file path=ppt/slides/slide38.xml><?xml version="1.0" encoding="utf-8"?>
+<file path=ppt/slides/slide4.xml><?xml version="1.0" encoding="utf-8"?>
+<p:sld xmlns:a="http://schemas.openxmlformats.org/drawingml/2006/main" xmlns:r="http://schemas.openxmlformats.org/officeDocument/2006/relationships" xmlns:p="http://schemas.openxmlformats.org/presentationml/2006/main">
+  <p:cSld>
+    <p:spTree>
+      <p:nvGrpSpPr>
+        <p:cNvPr id="1" name=""/>
+        <p:cNvGrpSpPr/>
+        <p:nvPr/>
+      </p:nvGrpSpPr>
+      <p:grpSpPr/>
+      <p:sp>
+        <p:nvSpPr>
+          <p:cNvPr id="4" name="标题 3"/>
+          <p:cNvSpPr>
+            <a:spLocks noGrp="1"/>
+          </p:cNvSpPr>
+          <p:nvPr>
+            <p:ph type="title"/>
+          </p:nvPr>
+        </p:nvSpPr>
+        <p:spPr/>
+        <p:txBody>
+          <a:bodyPr/>
+          <a:p>
+            <a:r>
+              <a:rPr lang="en-US" altLang="zh-CN"/>
+              <a:t>General</a:t>
+            </a:r>
+            <a:endParaRPr lang="en-US" altLang="zh-CN"/>
+          </a:p>
+        </p:txBody>
+      </p:sp>
+      <p:sp>
+        <p:nvSpPr>
+          <p:cNvPr id="5" name="文本占位符 4"/>
+          <p:cNvSpPr>
+            <a:spLocks noGrp="1"/>
+          </p:cNvSpPr>
+          <p:nvPr>
+            <p:ph type="body" idx="1"/>
+          </p:nvPr>
+        </p:nvSpPr>
+        <p:spPr/>
+        <p:txBody>
+          <a:bodyPr/>
+          <a:p>
+            <a:endParaRPr lang="zh-CN" altLang="en-US"/>
+          </a:p>
+        </p:txBody>
+      </p:sp>
+    </p:spTree>
+    <p:custDataLst>
+      <p:tags r:id="rId1"/>
+    </p:custDataLst>
+  </p:cSld>
+  <p:clrMapOvr>
+    <a:masterClrMapping/>
+  </p:clrMapOvr>
+</p:sld>
+</file>
+
+<file path=ppt/slides/slide40.xml><?xml version="1.0" encoding="utf-8"?>
 <p:sld xmlns:a="http://schemas.openxmlformats.org/drawingml/2006/main" xmlns:r="http://schemas.openxmlformats.org/officeDocument/2006/relationships" xmlns:p="http://schemas.openxmlformats.org/presentationml/2006/main">
   <p:cSld>
     <p:spTree>
@@ -12547,7 +13328,7 @@
 </p:sld>
 </file>
 
-<file path=ppt/slides/slide39.xml><?xml version="1.0" encoding="utf-8"?>
+<file path=ppt/slides/slide41.xml><?xml version="1.0" encoding="utf-8"?>
 <p:sld xmlns:a="http://schemas.openxmlformats.org/drawingml/2006/main" xmlns:r="http://schemas.openxmlformats.org/officeDocument/2006/relationships" xmlns:p="http://schemas.openxmlformats.org/presentationml/2006/main">
   <p:cSld>
     <p:spTree>
@@ -12979,68 +13760,7 @@
 </p:sld>
 </file>
 
-<file path=ppt/slides/slide4.xml><?xml version="1.0" encoding="utf-8"?>
-<p:sld xmlns:a="http://schemas.openxmlformats.org/drawingml/2006/main" xmlns:r="http://schemas.openxmlformats.org/officeDocument/2006/relationships" xmlns:p="http://schemas.openxmlformats.org/presentationml/2006/main">
-  <p:cSld>
-    <p:spTree>
-      <p:nvGrpSpPr>
-        <p:cNvPr id="1" name=""/>
-        <p:cNvGrpSpPr/>
-        <p:nvPr/>
-      </p:nvGrpSpPr>
-      <p:grpSpPr/>
-      <p:sp>
-        <p:nvSpPr>
-          <p:cNvPr id="4" name="标题 3"/>
-          <p:cNvSpPr>
-            <a:spLocks noGrp="1"/>
-          </p:cNvSpPr>
-          <p:nvPr>
-            <p:ph type="title"/>
-          </p:nvPr>
-        </p:nvSpPr>
-        <p:spPr/>
-        <p:txBody>
-          <a:bodyPr/>
-          <a:p>
-            <a:r>
-              <a:rPr lang="en-US" altLang="zh-CN"/>
-              <a:t>General</a:t>
-            </a:r>
-            <a:endParaRPr lang="en-US" altLang="zh-CN"/>
-          </a:p>
-        </p:txBody>
-      </p:sp>
-      <p:sp>
-        <p:nvSpPr>
-          <p:cNvPr id="5" name="文本占位符 4"/>
-          <p:cNvSpPr>
-            <a:spLocks noGrp="1"/>
-          </p:cNvSpPr>
-          <p:nvPr>
-            <p:ph type="body" idx="1"/>
-          </p:nvPr>
-        </p:nvSpPr>
-        <p:spPr/>
-        <p:txBody>
-          <a:bodyPr/>
-          <a:p>
-            <a:endParaRPr lang="zh-CN" altLang="en-US"/>
-          </a:p>
-        </p:txBody>
-      </p:sp>
-    </p:spTree>
-    <p:custDataLst>
-      <p:tags r:id="rId1"/>
-    </p:custDataLst>
-  </p:cSld>
-  <p:clrMapOvr>
-    <a:masterClrMapping/>
-  </p:clrMapOvr>
-</p:sld>
-</file>
-
-<file path=ppt/slides/slide40.xml><?xml version="1.0" encoding="utf-8"?>
+<file path=ppt/slides/slide42.xml><?xml version="1.0" encoding="utf-8"?>
 <p:sld xmlns:a="http://schemas.openxmlformats.org/drawingml/2006/main" xmlns:r="http://schemas.openxmlformats.org/officeDocument/2006/relationships" xmlns:p="http://schemas.openxmlformats.org/presentationml/2006/main">
   <p:cSld>
     <p:spTree>
@@ -13548,7 +14268,7 @@
 </p:sld>
 </file>
 
-<file path=ppt/slides/slide41.xml><?xml version="1.0" encoding="utf-8"?>
+<file path=ppt/slides/slide43.xml><?xml version="1.0" encoding="utf-8"?>
 <p:sld xmlns:a="http://schemas.openxmlformats.org/drawingml/2006/main" xmlns:r="http://schemas.openxmlformats.org/officeDocument/2006/relationships" xmlns:p="http://schemas.openxmlformats.org/presentationml/2006/main">
   <p:cSld>
     <p:spTree>
@@ -13707,7 +14427,7 @@
 </p:sld>
 </file>
 
-<file path=ppt/slides/slide42.xml><?xml version="1.0" encoding="utf-8"?>
+<file path=ppt/slides/slide44.xml><?xml version="1.0" encoding="utf-8"?>
 <p:sld xmlns:a="http://schemas.openxmlformats.org/drawingml/2006/main" xmlns:r="http://schemas.openxmlformats.org/officeDocument/2006/relationships" xmlns:p="http://schemas.openxmlformats.org/presentationml/2006/main">
   <p:cSld>
     <p:spTree>
@@ -14208,7 +14928,7 @@
 </p:sld>
 </file>
 
-<file path=ppt/slides/slide43.xml><?xml version="1.0" encoding="utf-8"?>
+<file path=ppt/slides/slide45.xml><?xml version="1.0" encoding="utf-8"?>
 <p:sld xmlns:a="http://schemas.openxmlformats.org/drawingml/2006/main" xmlns:r="http://schemas.openxmlformats.org/officeDocument/2006/relationships" xmlns:p="http://schemas.openxmlformats.org/presentationml/2006/main">
   <p:cSld>
     <p:spTree>
@@ -14663,7 +15383,7 @@
 </p:sld>
 </file>
 
-<file path=ppt/slides/slide44.xml><?xml version="1.0" encoding="utf-8"?>
+<file path=ppt/slides/slide46.xml><?xml version="1.0" encoding="utf-8"?>
 <p:sld xmlns:a="http://schemas.openxmlformats.org/drawingml/2006/main" xmlns:r="http://schemas.openxmlformats.org/officeDocument/2006/relationships" xmlns:p="http://schemas.openxmlformats.org/presentationml/2006/main">
   <p:cSld>
     <p:spTree>
@@ -14839,7 +15559,7 @@
 </p:sld>
 </file>
 
-<file path=ppt/slides/slide45.xml><?xml version="1.0" encoding="utf-8"?>
+<file path=ppt/slides/slide47.xml><?xml version="1.0" encoding="utf-8"?>
 <p:sld xmlns:a="http://schemas.openxmlformats.org/drawingml/2006/main" xmlns:r="http://schemas.openxmlformats.org/officeDocument/2006/relationships" xmlns:p="http://schemas.openxmlformats.org/presentationml/2006/main">
   <p:cSld>
     <p:spTree>
@@ -15326,7 +16046,7 @@
 </p:sld>
 </file>
 
-<file path=ppt/slides/slide46.xml><?xml version="1.0" encoding="utf-8"?>
+<file path=ppt/slides/slide48.xml><?xml version="1.0" encoding="utf-8"?>
 <p:sld xmlns:a="http://schemas.openxmlformats.org/drawingml/2006/main" xmlns:r="http://schemas.openxmlformats.org/officeDocument/2006/relationships" xmlns:p="http://schemas.openxmlformats.org/presentationml/2006/main">
   <p:cSld>
     <p:spTree>
@@ -15977,7 +16697,7 @@
 </p:sld>
 </file>
 
-<file path=ppt/slides/slide47.xml><?xml version="1.0" encoding="utf-8"?>
+<file path=ppt/slides/slide49.xml><?xml version="1.0" encoding="utf-8"?>
 <p:sld xmlns:a="http://schemas.openxmlformats.org/drawingml/2006/main" xmlns:r="http://schemas.openxmlformats.org/officeDocument/2006/relationships" xmlns:p="http://schemas.openxmlformats.org/presentationml/2006/main">
   <p:cSld>
     <p:spTree>
@@ -16389,7 +17109,154 @@
 </p:sld>
 </file>
 
-<file path=ppt/slides/slide48.xml><?xml version="1.0" encoding="utf-8"?>
+<file path=ppt/slides/slide5.xml><?xml version="1.0" encoding="utf-8"?>
+<p:sld xmlns:a="http://schemas.openxmlformats.org/drawingml/2006/main" xmlns:r="http://schemas.openxmlformats.org/officeDocument/2006/relationships" xmlns:p="http://schemas.openxmlformats.org/presentationml/2006/main">
+  <p:cSld>
+    <p:spTree>
+      <p:nvGrpSpPr>
+        <p:cNvPr id="1" name=""/>
+        <p:cNvGrpSpPr/>
+        <p:nvPr/>
+      </p:nvGrpSpPr>
+      <p:grpSpPr/>
+      <p:sp>
+        <p:nvSpPr>
+          <p:cNvPr id="2" name="标题 1"/>
+          <p:cNvSpPr>
+            <a:spLocks noGrp="1"/>
+          </p:cNvSpPr>
+          <p:nvPr>
+            <p:ph type="title"/>
+          </p:nvPr>
+        </p:nvSpPr>
+        <p:spPr/>
+        <p:txBody>
+          <a:bodyPr/>
+          <a:p>
+            <a:r>
+              <a:rPr lang="zh-CN" altLang="en-US"/>
+              <a:t>公有云、私有云、本地化部署</a:t>
+            </a:r>
+            <a:endParaRPr lang="zh-CN" altLang="en-US"/>
+          </a:p>
+        </p:txBody>
+      </p:sp>
+      <p:sp>
+        <p:nvSpPr>
+          <p:cNvPr id="3" name="内容占位符 2"/>
+          <p:cNvSpPr>
+            <a:spLocks noGrp="1"/>
+          </p:cNvSpPr>
+          <p:nvPr>
+            <p:ph idx="1"/>
+          </p:nvPr>
+        </p:nvSpPr>
+        <p:spPr>
+          <a:xfrm>
+            <a:off x="838200" y="1211580"/>
+            <a:ext cx="5430520" cy="4549140"/>
+          </a:xfrm>
+        </p:spPr>
+        <p:txBody>
+          <a:bodyPr>
+            <a:normAutofit fontScale="70000"/>
+          </a:bodyPr>
+          <a:p>
+            <a:r>
+              <a:rPr lang="en-US" altLang="zh-CN"/>
+              <a:t>References</a:t>
+            </a:r>
+            <a:endParaRPr lang="en-US" altLang="zh-CN"/>
+          </a:p>
+          <a:p>
+            <a:pPr lvl="1"/>
+            <a:r>
+              <a:rPr lang="en-US" altLang="zh-CN"/>
+              <a:t>https://xie.infoq.cn/article/6c96b1f0883b59c2a7bd1596c</a:t>
+            </a:r>
+            <a:endParaRPr lang="en-US" altLang="zh-CN"/>
+          </a:p>
+          <a:p>
+            <a:pPr lvl="0"/>
+            <a:r>
+              <a:rPr lang="en-US" altLang="zh-CN"/>
+              <a:t>Definitions</a:t>
+            </a:r>
+            <a:endParaRPr lang="en-US" altLang="zh-CN"/>
+          </a:p>
+          <a:p>
+            <a:pPr lvl="1"/>
+            <a:r>
+              <a:rPr lang="en-US" altLang="zh-CN"/>
+              <a:t>私有云(Private Clouds)是为一个客户单独使用而构建的，因而提供对数据、安全性和服务质量的最有效控制。该公司拥有基础设施，并可以控制在此基础设施上部署应用程序的方式。私有云可部署在企业数据中心的防火墙内，也可以将它们部署在一个安全的主机托管场所，私有云的核心属性是专有资源。</a:t>
+            </a:r>
+            <a:endParaRPr lang="en-US" altLang="zh-CN"/>
+          </a:p>
+          <a:p>
+            <a:pPr lvl="1"/>
+            <a:r>
+              <a:rPr lang="en-US" altLang="zh-CN"/>
+              <a:t>公有云通常指第三方提供商为用户提供的能够使用的云，公有云一般可通过 Internet 使用，可能是免费或成本低廉的，公有云的核心属性是共享资源服务。这种云有许多实例，可在当今整个开放的公有网络中提供服务。</a:t>
+            </a:r>
+            <a:endParaRPr lang="en-US" altLang="zh-CN"/>
+          </a:p>
+          <a:p>
+            <a:pPr lvl="1"/>
+            <a:r>
+              <a:rPr lang="zh-CN" altLang="en-US"/>
+              <a:t>本地化部署指运行在用户或组织所在的经营场所计算机中的软件，即自购的在自己公司营业场所运行的系统。</a:t>
+            </a:r>
+            <a:endParaRPr lang="zh-CN" altLang="en-US"/>
+          </a:p>
+          <a:p>
+            <a:pPr lvl="0"/>
+            <a:r>
+              <a:rPr lang="en-US" altLang="zh-CN" sz="2400"/>
+              <a:t>Differences</a:t>
+            </a:r>
+            <a:endParaRPr lang="en-US" altLang="zh-CN" sz="2400"/>
+          </a:p>
+          <a:p>
+            <a:pPr lvl="1"/>
+            <a:r>
+              <a:rPr lang="zh-CN" altLang="en-US"/>
+              <a:t>一个例子，说说私有云、公有云和本地化部署的区别。每个人都要住宿，租房子住相当于私有云模式，住宾馆相当于公有云模式，自己买房子住相当于本地化部署模式。</a:t>
+            </a:r>
+            <a:endParaRPr lang="zh-CN" altLang="en-US"/>
+          </a:p>
+        </p:txBody>
+      </p:sp>
+      <p:pic>
+        <p:nvPicPr>
+          <p:cNvPr id="4" name="图片 3"/>
+          <p:cNvPicPr/>
+          <p:nvPr/>
+        </p:nvPicPr>
+        <p:blipFill>
+          <a:blip r:embed="rId1"/>
+        </p:blipFill>
+        <p:spPr>
+          <a:xfrm>
+            <a:off x="7807027" y="-95885"/>
+            <a:ext cx="3795357" cy="6858000"/>
+          </a:xfrm>
+          <a:prstGeom prst="rect">
+            <a:avLst/>
+          </a:prstGeom>
+        </p:spPr>
+      </p:pic>
+    </p:spTree>
+    <p:custDataLst>
+      <p:tags r:id="rId2"/>
+    </p:custDataLst>
+  </p:cSld>
+  <p:clrMapOvr>
+    <a:masterClrMapping/>
+  </p:clrMapOvr>
+</p:sld>
+</file>
+
+<file path=ppt/slides/slide50.xml><?xml version="1.0" encoding="utf-8"?>
 <p:sld xmlns:a="http://schemas.openxmlformats.org/drawingml/2006/main" xmlns:r="http://schemas.openxmlformats.org/officeDocument/2006/relationships" xmlns:p="http://schemas.openxmlformats.org/presentationml/2006/main">
   <p:cSld>
     <p:spTree>
@@ -16877,7 +17744,7 @@
 </p:sld>
 </file>
 
-<file path=ppt/slides/slide49.xml><?xml version="1.0" encoding="utf-8"?>
+<file path=ppt/slides/slide51.xml><?xml version="1.0" encoding="utf-8"?>
 <p:sld xmlns:a="http://schemas.openxmlformats.org/drawingml/2006/main" xmlns:r="http://schemas.openxmlformats.org/officeDocument/2006/relationships" xmlns:p="http://schemas.openxmlformats.org/presentationml/2006/main">
   <p:cSld>
     <p:spTree>
@@ -17210,154 +18077,7 @@
 </p:sld>
 </file>
 
-<file path=ppt/slides/slide5.xml><?xml version="1.0" encoding="utf-8"?>
-<p:sld xmlns:a="http://schemas.openxmlformats.org/drawingml/2006/main" xmlns:r="http://schemas.openxmlformats.org/officeDocument/2006/relationships" xmlns:p="http://schemas.openxmlformats.org/presentationml/2006/main">
-  <p:cSld>
-    <p:spTree>
-      <p:nvGrpSpPr>
-        <p:cNvPr id="1" name=""/>
-        <p:cNvGrpSpPr/>
-        <p:nvPr/>
-      </p:nvGrpSpPr>
-      <p:grpSpPr/>
-      <p:sp>
-        <p:nvSpPr>
-          <p:cNvPr id="2" name="标题 1"/>
-          <p:cNvSpPr>
-            <a:spLocks noGrp="1"/>
-          </p:cNvSpPr>
-          <p:nvPr>
-            <p:ph type="title"/>
-          </p:nvPr>
-        </p:nvSpPr>
-        <p:spPr/>
-        <p:txBody>
-          <a:bodyPr/>
-          <a:p>
-            <a:r>
-              <a:rPr lang="zh-CN" altLang="en-US"/>
-              <a:t>公有云、私有云、本地化部署</a:t>
-            </a:r>
-            <a:endParaRPr lang="zh-CN" altLang="en-US"/>
-          </a:p>
-        </p:txBody>
-      </p:sp>
-      <p:sp>
-        <p:nvSpPr>
-          <p:cNvPr id="3" name="内容占位符 2"/>
-          <p:cNvSpPr>
-            <a:spLocks noGrp="1"/>
-          </p:cNvSpPr>
-          <p:nvPr>
-            <p:ph idx="1"/>
-          </p:nvPr>
-        </p:nvSpPr>
-        <p:spPr>
-          <a:xfrm>
-            <a:off x="838200" y="1211580"/>
-            <a:ext cx="5430520" cy="4549140"/>
-          </a:xfrm>
-        </p:spPr>
-        <p:txBody>
-          <a:bodyPr>
-            <a:normAutofit fontScale="70000"/>
-          </a:bodyPr>
-          <a:p>
-            <a:r>
-              <a:rPr lang="en-US" altLang="zh-CN"/>
-              <a:t>References</a:t>
-            </a:r>
-            <a:endParaRPr lang="en-US" altLang="zh-CN"/>
-          </a:p>
-          <a:p>
-            <a:pPr lvl="1"/>
-            <a:r>
-              <a:rPr lang="en-US" altLang="zh-CN"/>
-              <a:t>https://xie.infoq.cn/article/6c96b1f0883b59c2a7bd1596c</a:t>
-            </a:r>
-            <a:endParaRPr lang="en-US" altLang="zh-CN"/>
-          </a:p>
-          <a:p>
-            <a:pPr lvl="0"/>
-            <a:r>
-              <a:rPr lang="en-US" altLang="zh-CN"/>
-              <a:t>Definitions</a:t>
-            </a:r>
-            <a:endParaRPr lang="en-US" altLang="zh-CN"/>
-          </a:p>
-          <a:p>
-            <a:pPr lvl="1"/>
-            <a:r>
-              <a:rPr lang="en-US" altLang="zh-CN"/>
-              <a:t>私有云(Private Clouds)是为一个客户单独使用而构建的，因而提供对数据、安全性和服务质量的最有效控制。该公司拥有基础设施，并可以控制在此基础设施上部署应用程序的方式。私有云可部署在企业数据中心的防火墙内，也可以将它们部署在一个安全的主机托管场所，私有云的核心属性是专有资源。</a:t>
-            </a:r>
-            <a:endParaRPr lang="en-US" altLang="zh-CN"/>
-          </a:p>
-          <a:p>
-            <a:pPr lvl="1"/>
-            <a:r>
-              <a:rPr lang="en-US" altLang="zh-CN"/>
-              <a:t>公有云通常指第三方提供商为用户提供的能够使用的云，公有云一般可通过 Internet 使用，可能是免费或成本低廉的，公有云的核心属性是共享资源服务。这种云有许多实例，可在当今整个开放的公有网络中提供服务。</a:t>
-            </a:r>
-            <a:endParaRPr lang="en-US" altLang="zh-CN"/>
-          </a:p>
-          <a:p>
-            <a:pPr lvl="1"/>
-            <a:r>
-              <a:rPr lang="zh-CN" altLang="en-US"/>
-              <a:t>本地化部署指运行在用户或组织所在的经营场所计算机中的软件，即自购的在自己公司营业场所运行的系统。</a:t>
-            </a:r>
-            <a:endParaRPr lang="zh-CN" altLang="en-US"/>
-          </a:p>
-          <a:p>
-            <a:pPr lvl="0"/>
-            <a:r>
-              <a:rPr lang="en-US" altLang="zh-CN" sz="2400"/>
-              <a:t>Differences</a:t>
-            </a:r>
-            <a:endParaRPr lang="en-US" altLang="zh-CN" sz="2400"/>
-          </a:p>
-          <a:p>
-            <a:pPr lvl="1"/>
-            <a:r>
-              <a:rPr lang="zh-CN" altLang="en-US"/>
-              <a:t>一个例子，说说私有云、公有云和本地化部署的区别。每个人都要住宿，租房子住相当于私有云模式，住宾馆相当于公有云模式，自己买房子住相当于本地化部署模式。</a:t>
-            </a:r>
-            <a:endParaRPr lang="zh-CN" altLang="en-US"/>
-          </a:p>
-        </p:txBody>
-      </p:sp>
-      <p:pic>
-        <p:nvPicPr>
-          <p:cNvPr id="4" name="图片 3"/>
-          <p:cNvPicPr/>
-          <p:nvPr/>
-        </p:nvPicPr>
-        <p:blipFill>
-          <a:blip r:embed="rId1"/>
-        </p:blipFill>
-        <p:spPr>
-          <a:xfrm>
-            <a:off x="7807027" y="-95885"/>
-            <a:ext cx="3795357" cy="6858000"/>
-          </a:xfrm>
-          <a:prstGeom prst="rect">
-            <a:avLst/>
-          </a:prstGeom>
-        </p:spPr>
-      </p:pic>
-    </p:spTree>
-    <p:custDataLst>
-      <p:tags r:id="rId2"/>
-    </p:custDataLst>
-  </p:cSld>
-  <p:clrMapOvr>
-    <a:masterClrMapping/>
-  </p:clrMapOvr>
-</p:sld>
-</file>
-
-<file path=ppt/slides/slide50.xml><?xml version="1.0" encoding="utf-8"?>
+<file path=ppt/slides/slide52.xml><?xml version="1.0" encoding="utf-8"?>
 <p:sld xmlns:a="http://schemas.openxmlformats.org/drawingml/2006/main" xmlns:r="http://schemas.openxmlformats.org/officeDocument/2006/relationships" xmlns:p="http://schemas.openxmlformats.org/presentationml/2006/main">
   <p:cSld>
     <p:spTree>
@@ -17418,7 +18138,7 @@
 </p:sld>
 </file>
 
-<file path=ppt/slides/slide51.xml><?xml version="1.0" encoding="utf-8"?>
+<file path=ppt/slides/slide53.xml><?xml version="1.0" encoding="utf-8"?>
 <p:sld xmlns:a="http://schemas.openxmlformats.org/drawingml/2006/main" xmlns:r="http://schemas.openxmlformats.org/officeDocument/2006/relationships" xmlns:p="http://schemas.openxmlformats.org/presentationml/2006/main">
   <p:cSld>
     <p:spTree>
@@ -17985,7 +18705,7 @@
 </p:sld>
 </file>
 
-<file path=ppt/slides/slide52.xml><?xml version="1.0" encoding="utf-8"?>
+<file path=ppt/slides/slide54.xml><?xml version="1.0" encoding="utf-8"?>
 <p:sld xmlns:a="http://schemas.openxmlformats.org/drawingml/2006/main" xmlns:r="http://schemas.openxmlformats.org/officeDocument/2006/relationships" xmlns:p="http://schemas.openxmlformats.org/presentationml/2006/main">
   <p:cSld>
     <p:spTree>
@@ -18208,7 +18928,7 @@
 </p:sld>
 </file>
 
-<file path=ppt/slides/slide53.xml><?xml version="1.0" encoding="utf-8"?>
+<file path=ppt/slides/slide55.xml><?xml version="1.0" encoding="utf-8"?>
 <p:sld xmlns:a="http://schemas.openxmlformats.org/drawingml/2006/main" xmlns:r="http://schemas.openxmlformats.org/officeDocument/2006/relationships" xmlns:p="http://schemas.openxmlformats.org/presentationml/2006/main">
   <p:cSld>
     <p:spTree>
@@ -18269,7 +18989,7 @@
 </p:sld>
 </file>
 
-<file path=ppt/slides/slide54.xml><?xml version="1.0" encoding="utf-8"?>
+<file path=ppt/slides/slide56.xml><?xml version="1.0" encoding="utf-8"?>
 <p:sld xmlns:a="http://schemas.openxmlformats.org/drawingml/2006/main" xmlns:r="http://schemas.openxmlformats.org/officeDocument/2006/relationships" xmlns:p="http://schemas.openxmlformats.org/presentationml/2006/main">
   <p:cSld>
     <p:spTree>
@@ -18487,7 +19207,7 @@
 </p:sld>
 </file>
 
-<file path=ppt/slides/slide55.xml><?xml version="1.0" encoding="utf-8"?>
+<file path=ppt/slides/slide57.xml><?xml version="1.0" encoding="utf-8"?>
 <p:sld xmlns:a="http://schemas.openxmlformats.org/drawingml/2006/main" xmlns:r="http://schemas.openxmlformats.org/officeDocument/2006/relationships" xmlns:p="http://schemas.openxmlformats.org/presentationml/2006/main">
   <p:cSld>
     <p:spTree>
@@ -18564,273 +19284,6 @@
     </p:spTree>
     <p:custDataLst>
       <p:tags r:id="rId1"/>
-    </p:custDataLst>
-  </p:cSld>
-  <p:clrMapOvr>
-    <a:masterClrMapping/>
-  </p:clrMapOvr>
-</p:sld>
-</file>
-
-<file path=ppt/slides/slide56.xml><?xml version="1.0" encoding="utf-8"?>
-<p:sld xmlns:a="http://schemas.openxmlformats.org/drawingml/2006/main" xmlns:r="http://schemas.openxmlformats.org/officeDocument/2006/relationships" xmlns:p="http://schemas.openxmlformats.org/presentationml/2006/main">
-  <p:cSld>
-    <p:spTree>
-      <p:nvGrpSpPr>
-        <p:cNvPr id="1" name=""/>
-        <p:cNvGrpSpPr/>
-        <p:nvPr/>
-      </p:nvGrpSpPr>
-      <p:grpSpPr/>
-      <p:sp>
-        <p:nvSpPr>
-          <p:cNvPr id="4" name="标题 3"/>
-          <p:cNvSpPr>
-            <a:spLocks noGrp="1"/>
-          </p:cNvSpPr>
-          <p:nvPr>
-            <p:ph type="title"/>
-          </p:nvPr>
-        </p:nvSpPr>
-        <p:spPr/>
-        <p:txBody>
-          <a:bodyPr/>
-          <a:p>
-            <a:r>
-              <a:rPr lang="en-US" altLang="zh-CN"/>
-              <a:t>AWS</a:t>
-            </a:r>
-            <a:endParaRPr lang="en-US" altLang="zh-CN"/>
-          </a:p>
-        </p:txBody>
-      </p:sp>
-      <p:sp>
-        <p:nvSpPr>
-          <p:cNvPr id="5" name="文本占位符 4"/>
-          <p:cNvSpPr>
-            <a:spLocks noGrp="1"/>
-          </p:cNvSpPr>
-          <p:nvPr>
-            <p:ph type="body" idx="1"/>
-          </p:nvPr>
-        </p:nvSpPr>
-        <p:spPr/>
-        <p:txBody>
-          <a:bodyPr/>
-          <a:p>
-            <a:endParaRPr lang="zh-CN" altLang="en-US"/>
-          </a:p>
-        </p:txBody>
-      </p:sp>
-    </p:spTree>
-    <p:custDataLst>
-      <p:tags r:id="rId1"/>
-    </p:custDataLst>
-  </p:cSld>
-  <p:clrMapOvr>
-    <a:masterClrMapping/>
-  </p:clrMapOvr>
-</p:sld>
-</file>
-
-<file path=ppt/slides/slide57.xml><?xml version="1.0" encoding="utf-8"?>
-<p:sld xmlns:a="http://schemas.openxmlformats.org/drawingml/2006/main" xmlns:r="http://schemas.openxmlformats.org/officeDocument/2006/relationships" xmlns:p="http://schemas.openxmlformats.org/presentationml/2006/main">
-  <p:cSld>
-    <p:spTree>
-      <p:nvGrpSpPr>
-        <p:cNvPr id="1" name=""/>
-        <p:cNvGrpSpPr/>
-        <p:nvPr/>
-      </p:nvGrpSpPr>
-      <p:grpSpPr/>
-      <p:sp>
-        <p:nvSpPr>
-          <p:cNvPr id="4" name="标题 3"/>
-          <p:cNvSpPr>
-            <a:spLocks noGrp="1"/>
-          </p:cNvSpPr>
-          <p:nvPr>
-            <p:ph type="title"/>
-          </p:nvPr>
-        </p:nvSpPr>
-        <p:spPr/>
-        <p:txBody>
-          <a:bodyPr/>
-          <a:p>
-            <a:r>
-              <a:rPr lang="en-US" altLang="zh-CN"/>
-              <a:t>Set Up</a:t>
-            </a:r>
-            <a:endParaRPr lang="en-US" altLang="zh-CN"/>
-          </a:p>
-        </p:txBody>
-      </p:sp>
-      <p:sp>
-        <p:nvSpPr>
-          <p:cNvPr id="5" name="内容占位符 4"/>
-          <p:cNvSpPr>
-            <a:spLocks noGrp="1"/>
-          </p:cNvSpPr>
-          <p:nvPr>
-            <p:ph idx="1"/>
-          </p:nvPr>
-        </p:nvSpPr>
-        <p:spPr>
-          <a:xfrm>
-            <a:off x="838200" y="1211580"/>
-            <a:ext cx="6742430" cy="5454650"/>
-          </a:xfrm>
-        </p:spPr>
-        <p:txBody>
-          <a:bodyPr>
-            <a:normAutofit fontScale="80000"/>
-          </a:bodyPr>
-          <a:p>
-            <a:r>
-              <a:rPr lang="en-US" altLang="zh-CN"/>
-              <a:t>References</a:t>
-            </a:r>
-            <a:endParaRPr lang="en-US" altLang="zh-CN"/>
-          </a:p>
-          <a:p>
-            <a:pPr lvl="1"/>
-            <a:r>
-              <a:rPr lang="en-US" altLang="zh-CN"/>
-              <a:t>https://blog.csdn.net/m0_37263637/article/details/91045566</a:t>
-            </a:r>
-            <a:endParaRPr lang="en-US" altLang="zh-CN"/>
-          </a:p>
-          <a:p>
-            <a:pPr lvl="0"/>
-            <a:r>
-              <a:rPr lang="en-US" altLang="zh-CN"/>
-              <a:t>Steps</a:t>
-            </a:r>
-            <a:endParaRPr lang="en-US" altLang="zh-CN"/>
-          </a:p>
-          <a:p>
-            <a:pPr lvl="1"/>
-            <a:r>
-              <a:rPr lang="en-US" altLang="zh-CN"/>
-              <a:t>download .pem file</a:t>
-            </a:r>
-            <a:endParaRPr lang="en-US" altLang="zh-CN"/>
-          </a:p>
-          <a:p>
-            <a:pPr lvl="1"/>
-            <a:r>
-              <a:rPr lang="en-US" altLang="zh-CN">
-                <a:sym typeface="+mn-ea"/>
-              </a:rPr>
-              <a:t>create private key pair for a user (sparks) and download .pem</a:t>
-            </a:r>
-            <a:endParaRPr lang="en-US" altLang="zh-CN"/>
-          </a:p>
-          <a:p>
-            <a:pPr lvl="1"/>
-            <a:r>
-              <a:rPr lang="en-US" altLang="zh-CN">
-                <a:sym typeface="+mn-ea"/>
-              </a:rPr>
-              <a:t>ssh-keygen -y -f sparks.pem	// generate public key and save</a:t>
-            </a:r>
-            <a:endParaRPr lang="en-US" altLang="zh-CN"/>
-          </a:p>
-          <a:p>
-            <a:pPr lvl="1"/>
-            <a:r>
-              <a:rPr lang="en-US" altLang="zh-CN"/>
-              <a:t>ssh -i fishpano-jp.pem ubuntu@ec2-35-88-91-217.us-west-2.compute.amazonaws.com</a:t>
-            </a:r>
-            <a:endParaRPr lang="en-US" altLang="zh-CN"/>
-          </a:p>
-          <a:p>
-            <a:pPr lvl="1"/>
-            <a:r>
-              <a:rPr lang="en-US" altLang="zh-CN"/>
-              <a:t>sudo add user sparks</a:t>
-            </a:r>
-            <a:endParaRPr lang="en-US" altLang="zh-CN"/>
-          </a:p>
-          <a:p>
-            <a:pPr lvl="1"/>
-            <a:r>
-              <a:rPr lang="en-US" altLang="zh-CN"/>
-              <a:t>sudo vim /etc/sudoers	// add sparks as sudoer</a:t>
-            </a:r>
-            <a:endParaRPr lang="en-US" altLang="zh-CN"/>
-          </a:p>
-          <a:p>
-            <a:pPr lvl="1"/>
-            <a:r>
-              <a:rPr lang="en-US" altLang="zh-CN"/>
-              <a:t>sudo su sparks</a:t>
-            </a:r>
-            <a:endParaRPr lang="en-US" altLang="zh-CN"/>
-          </a:p>
-          <a:p>
-            <a:pPr lvl="1"/>
-            <a:r>
-              <a:rPr lang="en-US" altLang="zh-CN"/>
-              <a:t>mkdir ~/.ssh</a:t>
-            </a:r>
-            <a:endParaRPr lang="en-US" altLang="zh-CN"/>
-          </a:p>
-          <a:p>
-            <a:pPr lvl="1"/>
-            <a:r>
-              <a:rPr lang="en-US" altLang="zh-CN"/>
-              <a:t>vim ~/.ssh/authorized_keys	// paste public key for sparks into and save</a:t>
-            </a:r>
-            <a:endParaRPr lang="en-US" altLang="zh-CN"/>
-          </a:p>
-          <a:p>
-            <a:pPr lvl="1"/>
-            <a:r>
-              <a:rPr lang="en-US" altLang="zh-CN"/>
-              <a:t>ssh -i sparks.pem sparks@35.88.91.217	// ssh with new user</a:t>
-            </a:r>
-            <a:endParaRPr lang="en-US" altLang="zh-CN"/>
-          </a:p>
-          <a:p>
-            <a:pPr lvl="1"/>
-            <a:r>
-              <a:rPr lang="en-US" altLang="zh-CN"/>
-              <a:t>rsync -ahvz -e "ssh -i ../sparks.pem" --progress ../src/*.py $user_name@$host_name:$www_root</a:t>
-            </a:r>
-            <a:endParaRPr lang="en-US" altLang="zh-CN"/>
-          </a:p>
-        </p:txBody>
-      </p:sp>
-      <p:pic>
-        <p:nvPicPr>
-          <p:cNvPr id="100" name="图片 99"/>
-          <p:cNvPicPr/>
-          <p:nvPr/>
-        </p:nvPicPr>
-        <p:blipFill>
-          <a:blip r:embed="rId1"/>
-          <a:stretch>
-            <a:fillRect/>
-          </a:stretch>
-        </p:blipFill>
-        <p:spPr>
-          <a:xfrm>
-            <a:off x="7401560" y="914400"/>
-            <a:ext cx="4610100" cy="2912110"/>
-          </a:xfrm>
-          <a:prstGeom prst="rect">
-            <a:avLst/>
-          </a:prstGeom>
-          <a:noFill/>
-          <a:ln w="9525">
-            <a:noFill/>
-          </a:ln>
-        </p:spPr>
-      </p:pic>
-    </p:spTree>
-    <p:custDataLst>
-      <p:tags r:id="rId2"/>
     </p:custDataLst>
   </p:cSld>
   <p:clrMapOvr>
@@ -18865,7 +19318,7 @@
           <a:p>
             <a:r>
               <a:rPr lang="en-US" altLang="zh-CN"/>
-              <a:t>BaaS</a:t>
+              <a:t>AWS</a:t>
             </a:r>
             <a:endParaRPr lang="en-US" altLang="zh-CN"/>
           </a:p>
@@ -18885,11 +19338,7 @@
         <p:txBody>
           <a:bodyPr/>
           <a:p>
-            <a:r>
-              <a:rPr lang="en-US" altLang="zh-CN"/>
-              <a:t>Backend As A Service</a:t>
-            </a:r>
-            <a:endParaRPr lang="en-US" altLang="zh-CN"/>
+            <a:endParaRPr lang="zh-CN" altLang="en-US"/>
           </a:p>
         </p:txBody>
       </p:sp>
@@ -18930,7 +19379,7 @@
           <a:p>
             <a:r>
               <a:rPr lang="en-US" altLang="zh-CN"/>
-              <a:t>Introduction</a:t>
+              <a:t>Set Up</a:t>
             </a:r>
             <a:endParaRPr lang="en-US" altLang="zh-CN"/>
           </a:p>
@@ -18946,9 +19395,16 @@
             <p:ph idx="1"/>
           </p:nvPr>
         </p:nvSpPr>
-        <p:spPr/>
+        <p:spPr>
+          <a:xfrm>
+            <a:off x="838200" y="1211580"/>
+            <a:ext cx="6742430" cy="5454650"/>
+          </a:xfrm>
+        </p:spPr>
         <p:txBody>
-          <a:bodyPr/>
+          <a:bodyPr>
+            <a:normAutofit fontScale="80000"/>
+          </a:bodyPr>
           <a:p>
             <a:r>
               <a:rPr lang="en-US" altLang="zh-CN"/>
@@ -18958,21 +19414,143 @@
           </a:p>
           <a:p>
             <a:pPr lvl="1"/>
+            <a:r>
+              <a:rPr lang="en-US" altLang="zh-CN"/>
+              <a:t>https://blog.csdn.net/m0_37263637/article/details/91045566</a:t>
+            </a:r>
             <a:endParaRPr lang="en-US" altLang="zh-CN"/>
           </a:p>
           <a:p>
             <a:pPr lvl="0"/>
             <a:r>
               <a:rPr lang="en-US" altLang="zh-CN"/>
-              <a:t>Firebase</a:t>
+              <a:t>Steps</a:t>
+            </a:r>
+            <a:endParaRPr lang="en-US" altLang="zh-CN"/>
+          </a:p>
+          <a:p>
+            <a:pPr lvl="1"/>
+            <a:r>
+              <a:rPr lang="en-US" altLang="zh-CN"/>
+              <a:t>download .pem file</a:t>
+            </a:r>
+            <a:endParaRPr lang="en-US" altLang="zh-CN"/>
+          </a:p>
+          <a:p>
+            <a:pPr lvl="1"/>
+            <a:r>
+              <a:rPr lang="en-US" altLang="zh-CN">
+                <a:sym typeface="+mn-ea"/>
+              </a:rPr>
+              <a:t>create private key pair for a user (sparks) and download .pem</a:t>
+            </a:r>
+            <a:endParaRPr lang="en-US" altLang="zh-CN"/>
+          </a:p>
+          <a:p>
+            <a:pPr lvl="1"/>
+            <a:r>
+              <a:rPr lang="en-US" altLang="zh-CN">
+                <a:sym typeface="+mn-ea"/>
+              </a:rPr>
+              <a:t>ssh-keygen -y -f sparks.pem	// generate public key and save</a:t>
+            </a:r>
+            <a:endParaRPr lang="en-US" altLang="zh-CN"/>
+          </a:p>
+          <a:p>
+            <a:pPr lvl="1"/>
+            <a:r>
+              <a:rPr lang="en-US" altLang="zh-CN"/>
+              <a:t>ssh -i fishpano-jp.pem ubuntu@ec2-35-88-91-217.us-west-2.compute.amazonaws.com</a:t>
+            </a:r>
+            <a:endParaRPr lang="en-US" altLang="zh-CN"/>
+          </a:p>
+          <a:p>
+            <a:pPr lvl="1"/>
+            <a:r>
+              <a:rPr lang="en-US" altLang="zh-CN"/>
+              <a:t>sudo add user sparks</a:t>
+            </a:r>
+            <a:endParaRPr lang="en-US" altLang="zh-CN"/>
+          </a:p>
+          <a:p>
+            <a:pPr lvl="1"/>
+            <a:r>
+              <a:rPr lang="en-US" altLang="zh-CN"/>
+              <a:t>sudo vim /etc/sudoers	// add sparks as sudoer</a:t>
+            </a:r>
+            <a:endParaRPr lang="en-US" altLang="zh-CN"/>
+          </a:p>
+          <a:p>
+            <a:pPr lvl="1"/>
+            <a:r>
+              <a:rPr lang="en-US" altLang="zh-CN"/>
+              <a:t>sudo su sparks</a:t>
+            </a:r>
+            <a:endParaRPr lang="en-US" altLang="zh-CN"/>
+          </a:p>
+          <a:p>
+            <a:pPr lvl="1"/>
+            <a:r>
+              <a:rPr lang="en-US" altLang="zh-CN"/>
+              <a:t>mkdir ~/.ssh</a:t>
+            </a:r>
+            <a:endParaRPr lang="en-US" altLang="zh-CN"/>
+          </a:p>
+          <a:p>
+            <a:pPr lvl="1"/>
+            <a:r>
+              <a:rPr lang="en-US" altLang="zh-CN"/>
+              <a:t>vim ~/.ssh/authorized_keys	// paste public key for sparks into and save</a:t>
+            </a:r>
+            <a:endParaRPr lang="en-US" altLang="zh-CN"/>
+          </a:p>
+          <a:p>
+            <a:pPr lvl="1"/>
+            <a:r>
+              <a:rPr lang="en-US" altLang="zh-CN"/>
+              <a:t>ssh -i sparks.pem sparks@35.88.91.217	// ssh with new user</a:t>
+            </a:r>
+            <a:endParaRPr lang="en-US" altLang="zh-CN"/>
+          </a:p>
+          <a:p>
+            <a:pPr lvl="1"/>
+            <a:r>
+              <a:rPr lang="en-US" altLang="zh-CN"/>
+              <a:t>rsync -ahvz -e "ssh -i ../sparks.pem" --progress ../src/*.py $user_name@$host_name:$www_root</a:t>
             </a:r>
             <a:endParaRPr lang="en-US" altLang="zh-CN"/>
           </a:p>
         </p:txBody>
       </p:sp>
+      <p:pic>
+        <p:nvPicPr>
+          <p:cNvPr id="100" name="图片 99"/>
+          <p:cNvPicPr/>
+          <p:nvPr/>
+        </p:nvPicPr>
+        <p:blipFill>
+          <a:blip r:embed="rId1"/>
+          <a:stretch>
+            <a:fillRect/>
+          </a:stretch>
+        </p:blipFill>
+        <p:spPr>
+          <a:xfrm>
+            <a:off x="7401560" y="914400"/>
+            <a:ext cx="4610100" cy="2912110"/>
+          </a:xfrm>
+          <a:prstGeom prst="rect">
+            <a:avLst/>
+          </a:prstGeom>
+          <a:noFill/>
+          <a:ln w="9525">
+            <a:noFill/>
+          </a:ln>
+        </p:spPr>
+      </p:pic>
     </p:spTree>
     <p:custDataLst>
-      <p:tags r:id="rId1"/>
+      <p:tags r:id="rId2"/>
     </p:custDataLst>
   </p:cSld>
   <p:clrMapOvr>
@@ -20589,7 +21167,7 @@
       <p:grpSpPr/>
       <p:sp>
         <p:nvSpPr>
-          <p:cNvPr id="2" name="标题 1"/>
+          <p:cNvPr id="4" name="标题 3"/>
           <p:cNvSpPr>
             <a:spLocks noGrp="1"/>
           </p:cNvSpPr>
@@ -20603,7 +21181,7 @@
           <a:p>
             <a:r>
               <a:rPr lang="en-US" altLang="zh-CN"/>
-              <a:t>Firebase</a:t>
+              <a:t>BaaS</a:t>
             </a:r>
             <a:endParaRPr lang="en-US" altLang="zh-CN"/>
           </a:p>
@@ -20611,279 +21189,22 @@
       </p:sp>
       <p:sp>
         <p:nvSpPr>
-          <p:cNvPr id="3" name="内容占位符 2"/>
+          <p:cNvPr id="5" name="文本占位符 4"/>
           <p:cNvSpPr>
             <a:spLocks noGrp="1"/>
           </p:cNvSpPr>
           <p:nvPr>
-            <p:ph idx="1"/>
+            <p:ph type="body" idx="1"/>
           </p:nvPr>
         </p:nvSpPr>
-        <p:spPr>
-          <a:xfrm>
-            <a:off x="838200" y="1211580"/>
-            <a:ext cx="5182235" cy="4975225"/>
-          </a:xfrm>
-        </p:spPr>
+        <p:spPr/>
         <p:txBody>
-          <a:bodyPr>
-            <a:normAutofit fontScale="60000"/>
-          </a:bodyPr>
-          <a:p>
-            <a:r>
-              <a:rPr lang="en-US" altLang="zh-CN"/>
-              <a:t>References</a:t>
-            </a:r>
-            <a:endParaRPr lang="en-US" altLang="zh-CN"/>
-          </a:p>
-          <a:p>
-            <a:pPr lvl="1"/>
-            <a:r>
-              <a:rPr lang="en-US" altLang="zh-CN">
-                <a:sym typeface="+mn-ea"/>
-              </a:rPr>
-              <a:t>https://www.jianshu.com/p/b71f5d3b7c8c</a:t>
-            </a:r>
-            <a:endParaRPr lang="en-US" altLang="zh-CN">
-              <a:sym typeface="+mn-ea"/>
-            </a:endParaRPr>
-          </a:p>
-          <a:p>
-            <a:pPr lvl="0"/>
-            <a:r>
-              <a:rPr lang="en-US" altLang="zh-CN" sz="2400">
-                <a:sym typeface="+mn-ea"/>
-              </a:rPr>
-              <a:t>Functions</a:t>
-            </a:r>
-            <a:endParaRPr lang="en-US" altLang="zh-CN" sz="2400">
-              <a:sym typeface="+mn-ea"/>
-            </a:endParaRPr>
-          </a:p>
-          <a:p>
-            <a:pPr lvl="1"/>
-            <a:r>
-              <a:rPr lang="en-US" altLang="zh-CN" sz="2000">
-                <a:sym typeface="+mn-ea"/>
-              </a:rPr>
-              <a:t>Analytics</a:t>
-            </a:r>
-            <a:endParaRPr lang="en-US" altLang="zh-CN" sz="2000">
-              <a:sym typeface="+mn-ea"/>
-            </a:endParaRPr>
-          </a:p>
-          <a:p>
-            <a:pPr lvl="1"/>
-            <a:r>
-              <a:rPr lang="en-US" altLang="zh-CN" sz="2000">
-                <a:sym typeface="+mn-ea"/>
-              </a:rPr>
-              <a:t>FCM (Firebase Cloud Messaging) </a:t>
-            </a:r>
-            <a:r>
-              <a:rPr lang="zh-CN" altLang="en-US" sz="2000">
-                <a:sym typeface="+mn-ea"/>
-              </a:rPr>
-              <a:t>跨平台消息服务</a:t>
-            </a:r>
-            <a:endParaRPr lang="zh-CN" altLang="en-US" sz="2000">
-              <a:sym typeface="+mn-ea"/>
-            </a:endParaRPr>
-          </a:p>
-          <a:p>
-            <a:pPr lvl="2"/>
-            <a:r>
-              <a:rPr lang="zh-CN" altLang="en-US" sz="1800">
-                <a:sym typeface="+mn-ea"/>
-              </a:rPr>
-              <a:t>https://www.jianshu.com/p/b50f5aee4403</a:t>
-            </a:r>
-            <a:endParaRPr lang="zh-CN" altLang="en-US" sz="1800">
-              <a:sym typeface="+mn-ea"/>
-            </a:endParaRPr>
-          </a:p>
-          <a:p>
-            <a:pPr lvl="1"/>
-            <a:r>
-              <a:rPr lang="en-US" altLang="zh-CN" sz="2000">
-                <a:sym typeface="+mn-ea"/>
-              </a:rPr>
-              <a:t>Authentication</a:t>
-            </a:r>
-            <a:endParaRPr lang="en-US" altLang="zh-CN" sz="2000">
-              <a:sym typeface="+mn-ea"/>
-            </a:endParaRPr>
-          </a:p>
-          <a:p>
-            <a:pPr lvl="2"/>
-            <a:r>
-              <a:rPr lang="zh-CN" altLang="en-US">
-                <a:sym typeface="+mn-ea"/>
-              </a:rPr>
-              <a:t>支持</a:t>
-            </a:r>
-            <a:r>
-              <a:rPr lang="en-US" altLang="zh-CN">
-                <a:sym typeface="+mn-ea"/>
-              </a:rPr>
-              <a:t>email, Facebook, Twitter, Github, Google sign-in</a:t>
-            </a:r>
-            <a:endParaRPr lang="en-US" altLang="zh-CN">
-              <a:sym typeface="+mn-ea"/>
-            </a:endParaRPr>
-          </a:p>
-          <a:p>
-            <a:pPr lvl="1"/>
-            <a:r>
-              <a:rPr lang="en-US" altLang="zh-CN" sz="2000">
-                <a:sym typeface="+mn-ea"/>
-              </a:rPr>
-              <a:t>Realtime DB</a:t>
-            </a:r>
-            <a:endParaRPr lang="en-US" altLang="zh-CN" sz="2000">
-              <a:sym typeface="+mn-ea"/>
-            </a:endParaRPr>
-          </a:p>
-          <a:p>
-            <a:pPr lvl="2"/>
-            <a:r>
-              <a:rPr lang="en-US" altLang="zh-CN" sz="1800">
-                <a:sym typeface="+mn-ea"/>
-              </a:rPr>
-              <a:t>NoSQL, json, offline usage</a:t>
-            </a:r>
-            <a:endParaRPr lang="en-US" altLang="zh-CN" sz="1800">
-              <a:sym typeface="+mn-ea"/>
-            </a:endParaRPr>
-          </a:p>
-          <a:p>
-            <a:pPr lvl="1"/>
-            <a:r>
-              <a:rPr lang="en-US" altLang="zh-CN" sz="2000">
-                <a:sym typeface="+mn-ea"/>
-              </a:rPr>
-              <a:t>Storage</a:t>
-            </a:r>
-            <a:endParaRPr lang="en-US" altLang="zh-CN" sz="2000">
-              <a:sym typeface="+mn-ea"/>
-            </a:endParaRPr>
-          </a:p>
-          <a:p>
-            <a:pPr lvl="1"/>
-            <a:r>
-              <a:rPr lang="en-US" altLang="zh-CN" sz="2000">
-                <a:sym typeface="+mn-ea"/>
-              </a:rPr>
-              <a:t>Hosting</a:t>
-            </a:r>
-            <a:endParaRPr lang="en-US" altLang="zh-CN" sz="2000">
-              <a:sym typeface="+mn-ea"/>
-            </a:endParaRPr>
-          </a:p>
-          <a:p>
-            <a:pPr lvl="1"/>
-            <a:r>
-              <a:rPr lang="en-US" altLang="zh-CN" sz="2000">
-                <a:sym typeface="+mn-ea"/>
-              </a:rPr>
-              <a:t>Remote Config</a:t>
-            </a:r>
-            <a:endParaRPr lang="en-US" altLang="zh-CN" sz="2000">
-              <a:sym typeface="+mn-ea"/>
-            </a:endParaRPr>
-          </a:p>
-          <a:p>
-            <a:pPr lvl="1"/>
-            <a:r>
-              <a:rPr lang="en-US" altLang="zh-CN">
-                <a:sym typeface="+mn-ea"/>
-              </a:rPr>
-              <a:t>Test Lab</a:t>
-            </a:r>
-            <a:endParaRPr lang="en-US" altLang="zh-CN">
-              <a:sym typeface="+mn-ea"/>
-            </a:endParaRPr>
-          </a:p>
-          <a:p>
-            <a:pPr lvl="1"/>
-            <a:r>
-              <a:rPr lang="en-US" altLang="zh-CN">
-                <a:sym typeface="+mn-ea"/>
-              </a:rPr>
-              <a:t>Crash Reporting</a:t>
-            </a:r>
-            <a:endParaRPr lang="en-US" altLang="zh-CN">
-              <a:sym typeface="+mn-ea"/>
-            </a:endParaRPr>
-          </a:p>
-          <a:p>
-            <a:pPr lvl="1"/>
-            <a:r>
-              <a:rPr lang="en-US" altLang="zh-CN" sz="2000">
-                <a:sym typeface="+mn-ea"/>
-              </a:rPr>
-              <a:t>Notifications</a:t>
-            </a:r>
-            <a:endParaRPr lang="en-US" altLang="zh-CN" sz="2000">
-              <a:sym typeface="+mn-ea"/>
-            </a:endParaRPr>
-          </a:p>
-          <a:p>
-            <a:pPr lvl="1"/>
-            <a:r>
-              <a:rPr lang="en-US" altLang="zh-CN" sz="2000">
-                <a:sym typeface="+mn-ea"/>
-              </a:rPr>
-              <a:t>App Indexing</a:t>
-            </a:r>
-            <a:endParaRPr lang="en-US" altLang="zh-CN" sz="2000">
-              <a:sym typeface="+mn-ea"/>
-            </a:endParaRPr>
-          </a:p>
-          <a:p>
-            <a:pPr lvl="1"/>
-            <a:r>
-              <a:rPr lang="en-US" altLang="zh-CN" sz="2000">
-                <a:sym typeface="+mn-ea"/>
-              </a:rPr>
-              <a:t>Dynamic Links</a:t>
-            </a:r>
-            <a:endParaRPr lang="en-US" altLang="zh-CN" sz="2000">
-              <a:sym typeface="+mn-ea"/>
-            </a:endParaRPr>
-          </a:p>
-          <a:p>
-            <a:pPr lvl="1"/>
-            <a:r>
-              <a:rPr lang="en-US" altLang="zh-CN" sz="2000">
-                <a:sym typeface="+mn-ea"/>
-              </a:rPr>
-              <a:t>Invites</a:t>
-            </a:r>
-            <a:endParaRPr lang="en-US" altLang="zh-CN" sz="2000">
-              <a:sym typeface="+mn-ea"/>
-            </a:endParaRPr>
-          </a:p>
-          <a:p>
-            <a:pPr lvl="1"/>
-            <a:r>
-              <a:rPr lang="en-US" altLang="zh-CN" sz="2000">
-                <a:sym typeface="+mn-ea"/>
-              </a:rPr>
-              <a:t>AdWords, AdMob</a:t>
-            </a:r>
-            <a:endParaRPr lang="en-US" altLang="zh-CN" sz="2000">
-              <a:sym typeface="+mn-ea"/>
-            </a:endParaRPr>
-          </a:p>
-          <a:p>
-            <a:pPr lvl="1"/>
-            <a:endParaRPr lang="en-US" altLang="zh-CN">
-              <a:sym typeface="+mn-ea"/>
-            </a:endParaRPr>
-          </a:p>
-          <a:p>
-            <a:pPr lvl="0"/>
+          <a:bodyPr/>
+          <a:p>
+            <a:r>
+              <a:rPr lang="en-US" altLang="zh-CN"/>
+              <a:t>Backend As A Service</a:t>
+            </a:r>
             <a:endParaRPr lang="en-US" altLang="zh-CN"/>
           </a:p>
         </p:txBody>
@@ -20925,6 +21246,405 @@
           <a:p>
             <a:r>
               <a:rPr lang="en-US" altLang="zh-CN"/>
+              <a:t>Introduction</a:t>
+            </a:r>
+            <a:endParaRPr lang="en-US" altLang="zh-CN"/>
+          </a:p>
+        </p:txBody>
+      </p:sp>
+      <p:sp>
+        <p:nvSpPr>
+          <p:cNvPr id="5" name="内容占位符 4"/>
+          <p:cNvSpPr>
+            <a:spLocks noGrp="1"/>
+          </p:cNvSpPr>
+          <p:nvPr>
+            <p:ph idx="1"/>
+          </p:nvPr>
+        </p:nvSpPr>
+        <p:spPr/>
+        <p:txBody>
+          <a:bodyPr/>
+          <a:p>
+            <a:r>
+              <a:rPr lang="en-US" altLang="zh-CN"/>
+              <a:t>References</a:t>
+            </a:r>
+            <a:endParaRPr lang="en-US" altLang="zh-CN"/>
+          </a:p>
+          <a:p>
+            <a:pPr lvl="1"/>
+            <a:endParaRPr lang="en-US" altLang="zh-CN"/>
+          </a:p>
+          <a:p>
+            <a:pPr lvl="0"/>
+            <a:r>
+              <a:rPr lang="en-US" altLang="zh-CN"/>
+              <a:t>Firebase</a:t>
+            </a:r>
+            <a:endParaRPr lang="en-US" altLang="zh-CN"/>
+          </a:p>
+        </p:txBody>
+      </p:sp>
+    </p:spTree>
+    <p:custDataLst>
+      <p:tags r:id="rId1"/>
+    </p:custDataLst>
+  </p:cSld>
+  <p:clrMapOvr>
+    <a:masterClrMapping/>
+  </p:clrMapOvr>
+</p:sld>
+</file>
+
+<file path=ppt/slides/slide62.xml><?xml version="1.0" encoding="utf-8"?>
+<p:sld xmlns:a="http://schemas.openxmlformats.org/drawingml/2006/main" xmlns:r="http://schemas.openxmlformats.org/officeDocument/2006/relationships" xmlns:p="http://schemas.openxmlformats.org/presentationml/2006/main">
+  <p:cSld>
+    <p:spTree>
+      <p:nvGrpSpPr>
+        <p:cNvPr id="1" name=""/>
+        <p:cNvGrpSpPr/>
+        <p:nvPr/>
+      </p:nvGrpSpPr>
+      <p:grpSpPr/>
+      <p:sp>
+        <p:nvSpPr>
+          <p:cNvPr id="2" name="标题 1"/>
+          <p:cNvSpPr>
+            <a:spLocks noGrp="1"/>
+          </p:cNvSpPr>
+          <p:nvPr>
+            <p:ph type="title"/>
+          </p:nvPr>
+        </p:nvSpPr>
+        <p:spPr/>
+        <p:txBody>
+          <a:bodyPr/>
+          <a:p>
+            <a:r>
+              <a:rPr lang="en-US" altLang="zh-CN"/>
+              <a:t>Firebase</a:t>
+            </a:r>
+            <a:endParaRPr lang="en-US" altLang="zh-CN"/>
+          </a:p>
+        </p:txBody>
+      </p:sp>
+      <p:sp>
+        <p:nvSpPr>
+          <p:cNvPr id="3" name="内容占位符 2"/>
+          <p:cNvSpPr>
+            <a:spLocks noGrp="1"/>
+          </p:cNvSpPr>
+          <p:nvPr>
+            <p:ph idx="1"/>
+          </p:nvPr>
+        </p:nvSpPr>
+        <p:spPr>
+          <a:xfrm>
+            <a:off x="838200" y="1211580"/>
+            <a:ext cx="5182235" cy="4975225"/>
+          </a:xfrm>
+        </p:spPr>
+        <p:txBody>
+          <a:bodyPr>
+            <a:normAutofit fontScale="60000"/>
+          </a:bodyPr>
+          <a:p>
+            <a:r>
+              <a:rPr lang="en-US" altLang="zh-CN"/>
+              <a:t>References</a:t>
+            </a:r>
+            <a:endParaRPr lang="en-US" altLang="zh-CN"/>
+          </a:p>
+          <a:p>
+            <a:pPr lvl="1"/>
+            <a:r>
+              <a:rPr lang="en-US" altLang="zh-CN">
+                <a:sym typeface="+mn-ea"/>
+              </a:rPr>
+              <a:t>https://www.jianshu.com/p/b71f5d3b7c8c</a:t>
+            </a:r>
+            <a:endParaRPr lang="en-US" altLang="zh-CN">
+              <a:sym typeface="+mn-ea"/>
+            </a:endParaRPr>
+          </a:p>
+          <a:p>
+            <a:pPr lvl="0"/>
+            <a:r>
+              <a:rPr lang="en-US" altLang="zh-CN" sz="2400">
+                <a:sym typeface="+mn-ea"/>
+              </a:rPr>
+              <a:t>Functions</a:t>
+            </a:r>
+            <a:endParaRPr lang="en-US" altLang="zh-CN" sz="2400">
+              <a:sym typeface="+mn-ea"/>
+            </a:endParaRPr>
+          </a:p>
+          <a:p>
+            <a:pPr lvl="1"/>
+            <a:r>
+              <a:rPr lang="en-US" altLang="zh-CN" sz="2000">
+                <a:sym typeface="+mn-ea"/>
+              </a:rPr>
+              <a:t>Analytics</a:t>
+            </a:r>
+            <a:endParaRPr lang="en-US" altLang="zh-CN" sz="2000">
+              <a:sym typeface="+mn-ea"/>
+            </a:endParaRPr>
+          </a:p>
+          <a:p>
+            <a:pPr lvl="1"/>
+            <a:r>
+              <a:rPr lang="en-US" altLang="zh-CN" sz="2000">
+                <a:sym typeface="+mn-ea"/>
+              </a:rPr>
+              <a:t>FCM (Firebase Cloud Messaging) </a:t>
+            </a:r>
+            <a:r>
+              <a:rPr lang="zh-CN" altLang="en-US" sz="2000">
+                <a:sym typeface="+mn-ea"/>
+              </a:rPr>
+              <a:t>跨平台消息服务</a:t>
+            </a:r>
+            <a:endParaRPr lang="zh-CN" altLang="en-US" sz="2000">
+              <a:sym typeface="+mn-ea"/>
+            </a:endParaRPr>
+          </a:p>
+          <a:p>
+            <a:pPr lvl="2"/>
+            <a:r>
+              <a:rPr lang="zh-CN" altLang="en-US" sz="1800">
+                <a:sym typeface="+mn-ea"/>
+              </a:rPr>
+              <a:t>https://www.jianshu.com/p/b50f5aee4403</a:t>
+            </a:r>
+            <a:endParaRPr lang="zh-CN" altLang="en-US" sz="1800">
+              <a:sym typeface="+mn-ea"/>
+            </a:endParaRPr>
+          </a:p>
+          <a:p>
+            <a:pPr lvl="1"/>
+            <a:r>
+              <a:rPr lang="en-US" altLang="zh-CN" sz="2000">
+                <a:sym typeface="+mn-ea"/>
+              </a:rPr>
+              <a:t>Authentication</a:t>
+            </a:r>
+            <a:endParaRPr lang="en-US" altLang="zh-CN" sz="2000">
+              <a:sym typeface="+mn-ea"/>
+            </a:endParaRPr>
+          </a:p>
+          <a:p>
+            <a:pPr lvl="2"/>
+            <a:r>
+              <a:rPr lang="zh-CN" altLang="en-US">
+                <a:sym typeface="+mn-ea"/>
+              </a:rPr>
+              <a:t>支持</a:t>
+            </a:r>
+            <a:r>
+              <a:rPr lang="en-US" altLang="zh-CN">
+                <a:sym typeface="+mn-ea"/>
+              </a:rPr>
+              <a:t>email, Facebook, Twitter, Github, Google sign-in</a:t>
+            </a:r>
+            <a:endParaRPr lang="en-US" altLang="zh-CN">
+              <a:sym typeface="+mn-ea"/>
+            </a:endParaRPr>
+          </a:p>
+          <a:p>
+            <a:pPr lvl="1"/>
+            <a:r>
+              <a:rPr lang="en-US" altLang="zh-CN" sz="2000">
+                <a:sym typeface="+mn-ea"/>
+              </a:rPr>
+              <a:t>Realtime DB</a:t>
+            </a:r>
+            <a:endParaRPr lang="en-US" altLang="zh-CN" sz="2000">
+              <a:sym typeface="+mn-ea"/>
+            </a:endParaRPr>
+          </a:p>
+          <a:p>
+            <a:pPr lvl="2"/>
+            <a:r>
+              <a:rPr lang="en-US" altLang="zh-CN" sz="1800">
+                <a:sym typeface="+mn-ea"/>
+              </a:rPr>
+              <a:t>NoSQL, json, offline usage</a:t>
+            </a:r>
+            <a:endParaRPr lang="en-US" altLang="zh-CN" sz="1800">
+              <a:sym typeface="+mn-ea"/>
+            </a:endParaRPr>
+          </a:p>
+          <a:p>
+            <a:pPr lvl="1"/>
+            <a:r>
+              <a:rPr lang="en-US" altLang="zh-CN" sz="2000">
+                <a:sym typeface="+mn-ea"/>
+              </a:rPr>
+              <a:t>Storage</a:t>
+            </a:r>
+            <a:endParaRPr lang="en-US" altLang="zh-CN" sz="2000">
+              <a:sym typeface="+mn-ea"/>
+            </a:endParaRPr>
+          </a:p>
+          <a:p>
+            <a:pPr lvl="1"/>
+            <a:r>
+              <a:rPr lang="en-US" altLang="zh-CN" sz="2000">
+                <a:sym typeface="+mn-ea"/>
+              </a:rPr>
+              <a:t>Hosting</a:t>
+            </a:r>
+            <a:endParaRPr lang="en-US" altLang="zh-CN" sz="2000">
+              <a:sym typeface="+mn-ea"/>
+            </a:endParaRPr>
+          </a:p>
+          <a:p>
+            <a:pPr lvl="1"/>
+            <a:r>
+              <a:rPr lang="en-US" altLang="zh-CN" sz="2000">
+                <a:sym typeface="+mn-ea"/>
+              </a:rPr>
+              <a:t>Remote Config</a:t>
+            </a:r>
+            <a:endParaRPr lang="en-US" altLang="zh-CN" sz="2000">
+              <a:sym typeface="+mn-ea"/>
+            </a:endParaRPr>
+          </a:p>
+          <a:p>
+            <a:pPr lvl="1"/>
+            <a:r>
+              <a:rPr lang="en-US" altLang="zh-CN">
+                <a:sym typeface="+mn-ea"/>
+              </a:rPr>
+              <a:t>Test Lab</a:t>
+            </a:r>
+            <a:endParaRPr lang="en-US" altLang="zh-CN">
+              <a:sym typeface="+mn-ea"/>
+            </a:endParaRPr>
+          </a:p>
+          <a:p>
+            <a:pPr lvl="1"/>
+            <a:r>
+              <a:rPr lang="en-US" altLang="zh-CN">
+                <a:sym typeface="+mn-ea"/>
+              </a:rPr>
+              <a:t>Crash Reporting</a:t>
+            </a:r>
+            <a:endParaRPr lang="en-US" altLang="zh-CN">
+              <a:sym typeface="+mn-ea"/>
+            </a:endParaRPr>
+          </a:p>
+          <a:p>
+            <a:pPr lvl="1"/>
+            <a:r>
+              <a:rPr lang="en-US" altLang="zh-CN" sz="2000">
+                <a:sym typeface="+mn-ea"/>
+              </a:rPr>
+              <a:t>Notifications</a:t>
+            </a:r>
+            <a:endParaRPr lang="en-US" altLang="zh-CN" sz="2000">
+              <a:sym typeface="+mn-ea"/>
+            </a:endParaRPr>
+          </a:p>
+          <a:p>
+            <a:pPr lvl="1"/>
+            <a:r>
+              <a:rPr lang="en-US" altLang="zh-CN" sz="2000">
+                <a:sym typeface="+mn-ea"/>
+              </a:rPr>
+              <a:t>App Indexing</a:t>
+            </a:r>
+            <a:endParaRPr lang="en-US" altLang="zh-CN" sz="2000">
+              <a:sym typeface="+mn-ea"/>
+            </a:endParaRPr>
+          </a:p>
+          <a:p>
+            <a:pPr lvl="1"/>
+            <a:r>
+              <a:rPr lang="en-US" altLang="zh-CN" sz="2000">
+                <a:sym typeface="+mn-ea"/>
+              </a:rPr>
+              <a:t>Dynamic Links</a:t>
+            </a:r>
+            <a:endParaRPr lang="en-US" altLang="zh-CN" sz="2000">
+              <a:sym typeface="+mn-ea"/>
+            </a:endParaRPr>
+          </a:p>
+          <a:p>
+            <a:pPr lvl="1"/>
+            <a:r>
+              <a:rPr lang="en-US" altLang="zh-CN" sz="2000">
+                <a:sym typeface="+mn-ea"/>
+              </a:rPr>
+              <a:t>Invites</a:t>
+            </a:r>
+            <a:endParaRPr lang="en-US" altLang="zh-CN" sz="2000">
+              <a:sym typeface="+mn-ea"/>
+            </a:endParaRPr>
+          </a:p>
+          <a:p>
+            <a:pPr lvl="1"/>
+            <a:r>
+              <a:rPr lang="en-US" altLang="zh-CN" sz="2000">
+                <a:sym typeface="+mn-ea"/>
+              </a:rPr>
+              <a:t>AdWords, AdMob</a:t>
+            </a:r>
+            <a:endParaRPr lang="en-US" altLang="zh-CN" sz="2000">
+              <a:sym typeface="+mn-ea"/>
+            </a:endParaRPr>
+          </a:p>
+          <a:p>
+            <a:pPr lvl="1"/>
+            <a:endParaRPr lang="en-US" altLang="zh-CN">
+              <a:sym typeface="+mn-ea"/>
+            </a:endParaRPr>
+          </a:p>
+          <a:p>
+            <a:pPr lvl="0"/>
+            <a:endParaRPr lang="en-US" altLang="zh-CN"/>
+          </a:p>
+        </p:txBody>
+      </p:sp>
+    </p:spTree>
+    <p:custDataLst>
+      <p:tags r:id="rId1"/>
+    </p:custDataLst>
+  </p:cSld>
+  <p:clrMapOvr>
+    <a:masterClrMapping/>
+  </p:clrMapOvr>
+</p:sld>
+</file>
+
+<file path=ppt/slides/slide63.xml><?xml version="1.0" encoding="utf-8"?>
+<p:sld xmlns:a="http://schemas.openxmlformats.org/drawingml/2006/main" xmlns:r="http://schemas.openxmlformats.org/officeDocument/2006/relationships" xmlns:p="http://schemas.openxmlformats.org/presentationml/2006/main">
+  <p:cSld>
+    <p:spTree>
+      <p:nvGrpSpPr>
+        <p:cNvPr id="1" name=""/>
+        <p:cNvGrpSpPr/>
+        <p:nvPr/>
+      </p:nvGrpSpPr>
+      <p:grpSpPr/>
+      <p:sp>
+        <p:nvSpPr>
+          <p:cNvPr id="4" name="标题 3"/>
+          <p:cNvSpPr>
+            <a:spLocks noGrp="1"/>
+          </p:cNvSpPr>
+          <p:nvPr>
+            <p:ph type="title"/>
+          </p:nvPr>
+        </p:nvSpPr>
+        <p:spPr/>
+        <p:txBody>
+          <a:bodyPr/>
+          <a:p>
+            <a:r>
+              <a:rPr lang="en-US" altLang="zh-CN"/>
               <a:t>API Testing</a:t>
             </a:r>
             <a:endParaRPr lang="en-US" altLang="zh-CN"/>
@@ -20960,7 +21680,7 @@
 </p:sld>
 </file>
 
-<file path=ppt/slides/slide62.xml><?xml version="1.0" encoding="utf-8"?>
+<file path=ppt/slides/slide64.xml><?xml version="1.0" encoding="utf-8"?>
 <p:sld xmlns:a="http://schemas.openxmlformats.org/drawingml/2006/main" xmlns:r="http://schemas.openxmlformats.org/officeDocument/2006/relationships" xmlns:p="http://schemas.openxmlformats.org/presentationml/2006/main">
   <p:cSld>
     <p:spTree>
@@ -21031,7 +21751,7 @@
 </p:sld>
 </file>
 
-<file path=ppt/slides/slide63.xml><?xml version="1.0" encoding="utf-8"?>
+<file path=ppt/slides/slide65.xml><?xml version="1.0" encoding="utf-8"?>
 <p:sld xmlns:a="http://schemas.openxmlformats.org/drawingml/2006/main" xmlns:r="http://schemas.openxmlformats.org/officeDocument/2006/relationships" xmlns:p="http://schemas.openxmlformats.org/presentationml/2006/main">
   <p:cSld>
     <p:spTree>
@@ -21411,7 +22131,7 @@
 </p:sld>
 </file>
 
-<file path=ppt/slides/slide64.xml><?xml version="1.0" encoding="utf-8"?>
+<file path=ppt/slides/slide66.xml><?xml version="1.0" encoding="utf-8"?>
 <p:sld xmlns:a="http://schemas.openxmlformats.org/drawingml/2006/main" xmlns:r="http://schemas.openxmlformats.org/officeDocument/2006/relationships" xmlns:p="http://schemas.openxmlformats.org/presentationml/2006/main">
   <p:cSld>
     <p:spTree>
@@ -21478,235 +22198,6 @@
 </p:sld>
 </file>
 
-<file path=ppt/slides/slide65.xml><?xml version="1.0" encoding="utf-8"?>
-<p:sld xmlns:a="http://schemas.openxmlformats.org/drawingml/2006/main" xmlns:r="http://schemas.openxmlformats.org/officeDocument/2006/relationships" xmlns:p="http://schemas.openxmlformats.org/presentationml/2006/main">
-  <p:cSld>
-    <p:spTree>
-      <p:nvGrpSpPr>
-        <p:cNvPr id="1" name=""/>
-        <p:cNvGrpSpPr/>
-        <p:nvPr/>
-      </p:nvGrpSpPr>
-      <p:grpSpPr/>
-      <p:sp>
-        <p:nvSpPr>
-          <p:cNvPr id="4" name="标题 3"/>
-          <p:cNvSpPr>
-            <a:spLocks noGrp="1"/>
-          </p:cNvSpPr>
-          <p:nvPr>
-            <p:ph type="title"/>
-          </p:nvPr>
-        </p:nvSpPr>
-        <p:spPr/>
-        <p:txBody>
-          <a:bodyPr/>
-          <a:p>
-            <a:r>
-              <a:rPr lang="en-US" altLang="zh-CN"/>
-              <a:t>CMS</a:t>
-            </a:r>
-            <a:endParaRPr lang="en-US" altLang="zh-CN"/>
-          </a:p>
-        </p:txBody>
-      </p:sp>
-      <p:sp>
-        <p:nvSpPr>
-          <p:cNvPr id="5" name="文本占位符 4"/>
-          <p:cNvSpPr>
-            <a:spLocks noGrp="1"/>
-          </p:cNvSpPr>
-          <p:nvPr>
-            <p:ph type="body" idx="1"/>
-          </p:nvPr>
-        </p:nvSpPr>
-        <p:spPr/>
-        <p:txBody>
-          <a:bodyPr/>
-          <a:p>
-            <a:endParaRPr lang="zh-CN" altLang="en-US"/>
-          </a:p>
-        </p:txBody>
-      </p:sp>
-    </p:spTree>
-    <p:custDataLst>
-      <p:tags r:id="rId1"/>
-    </p:custDataLst>
-  </p:cSld>
-  <p:clrMapOvr>
-    <a:masterClrMapping/>
-  </p:clrMapOvr>
-</p:sld>
-</file>
-
-<file path=ppt/slides/slide66.xml><?xml version="1.0" encoding="utf-8"?>
-<p:sld xmlns:a="http://schemas.openxmlformats.org/drawingml/2006/main" xmlns:r="http://schemas.openxmlformats.org/officeDocument/2006/relationships" xmlns:p="http://schemas.openxmlformats.org/presentationml/2006/main">
-  <p:cSld>
-    <p:spTree>
-      <p:nvGrpSpPr>
-        <p:cNvPr id="1" name=""/>
-        <p:cNvGrpSpPr/>
-        <p:nvPr/>
-      </p:nvGrpSpPr>
-      <p:grpSpPr/>
-      <p:sp>
-        <p:nvSpPr>
-          <p:cNvPr id="4" name="标题 3"/>
-          <p:cNvSpPr>
-            <a:spLocks noGrp="1"/>
-          </p:cNvSpPr>
-          <p:nvPr>
-            <p:ph type="title"/>
-          </p:nvPr>
-        </p:nvSpPr>
-        <p:spPr/>
-        <p:txBody>
-          <a:bodyPr/>
-          <a:p>
-            <a:r>
-              <a:rPr lang="en-US" altLang="zh-CN"/>
-              <a:t>Lin CMS</a:t>
-            </a:r>
-            <a:endParaRPr lang="en-US" altLang="zh-CN"/>
-          </a:p>
-        </p:txBody>
-      </p:sp>
-      <p:sp>
-        <p:nvSpPr>
-          <p:cNvPr id="5" name="内容占位符 4"/>
-          <p:cNvSpPr>
-            <a:spLocks noGrp="1"/>
-          </p:cNvSpPr>
-          <p:nvPr>
-            <p:ph idx="1"/>
-          </p:nvPr>
-        </p:nvSpPr>
-        <p:spPr>
-          <a:xfrm>
-            <a:off x="838200" y="1211580"/>
-            <a:ext cx="5467985" cy="4549140"/>
-          </a:xfrm>
-        </p:spPr>
-        <p:txBody>
-          <a:bodyPr>
-            <a:normAutofit lnSpcReduction="10000"/>
-          </a:bodyPr>
-          <a:p>
-            <a:r>
-              <a:rPr lang="zh-CN" altLang="en-US"/>
-              <a:t>https://github.com/TaleLin/lin-cms-flask</a:t>
-            </a:r>
-            <a:endParaRPr lang="zh-CN" altLang="en-US"/>
-          </a:p>
-          <a:p>
-            <a:pPr lvl="1"/>
-            <a:r>
-              <a:rPr lang="en-US" altLang="zh-CN"/>
-              <a:t>MIT</a:t>
-            </a:r>
-            <a:endParaRPr lang="en-US" altLang="zh-CN"/>
-          </a:p>
-          <a:p>
-            <a:pPr lvl="1"/>
-            <a:r>
-              <a:rPr lang="zh-CN" altLang="en-US"/>
-              <a:t>前后端分离</a:t>
-            </a:r>
-            <a:endParaRPr lang="zh-CN" altLang="en-US"/>
-          </a:p>
-          <a:p>
-            <a:pPr lvl="1"/>
-            <a:r>
-              <a:rPr lang="zh-CN" altLang="en-US"/>
-              <a:t>功能</a:t>
-            </a:r>
-            <a:endParaRPr lang="zh-CN" altLang="en-US"/>
-          </a:p>
-          <a:p>
-            <a:pPr lvl="2"/>
-            <a:r>
-              <a:rPr lang="zh-CN" altLang="en-US"/>
-              <a:t>内置了 CMS 中最为常见的需求：用户管理、权限管理、日志系统等</a:t>
-            </a:r>
-            <a:endParaRPr lang="zh-CN" altLang="en-US"/>
-          </a:p>
-          <a:p>
-            <a:pPr lvl="1"/>
-            <a:r>
-              <a:rPr lang="zh-CN" altLang="en-US"/>
-              <a:t>实现</a:t>
-            </a:r>
-            <a:endParaRPr lang="zh-CN" altLang="en-US"/>
-          </a:p>
-          <a:p>
-            <a:pPr lvl="2"/>
-            <a:r>
-              <a:rPr lang="zh-CN" altLang="en-US"/>
-              <a:t>后端：</a:t>
-            </a:r>
-            <a:r>
-              <a:rPr lang="en-US" altLang="zh-CN"/>
-              <a:t>flask</a:t>
-            </a:r>
-            <a:endParaRPr lang="en-US" altLang="zh-CN"/>
-          </a:p>
-          <a:p>
-            <a:pPr lvl="2"/>
-            <a:r>
-              <a:rPr lang="zh-CN" altLang="en-US"/>
-              <a:t>前端：</a:t>
-            </a:r>
-            <a:r>
-              <a:rPr lang="en-US" altLang="zh-CN"/>
-              <a:t>vue3</a:t>
-            </a:r>
-            <a:r>
-              <a:rPr lang="zh-CN" altLang="en-US"/>
-              <a:t>，</a:t>
-            </a:r>
-            <a:r>
-              <a:rPr lang="en-US" altLang="zh-CN"/>
-              <a:t>element plus</a:t>
-            </a:r>
-            <a:endParaRPr lang="en-US" altLang="zh-CN"/>
-          </a:p>
-          <a:p>
-            <a:pPr lvl="0"/>
-            <a:r>
-              <a:rPr lang="zh-CN" altLang="en-US"/>
-              <a:t>后端</a:t>
-            </a:r>
-            <a:endParaRPr lang="zh-CN" altLang="en-US"/>
-          </a:p>
-          <a:p>
-            <a:pPr lvl="1"/>
-            <a:r>
-              <a:rPr lang="zh-CN" altLang="en-US"/>
-              <a:t>git clone https://github.com/TaleLin/lin-cms-flask.git starter</a:t>
-            </a:r>
-            <a:endParaRPr lang="zh-CN" altLang="en-US"/>
-          </a:p>
-          <a:p>
-            <a:pPr lvl="1"/>
-            <a:r>
-              <a:rPr lang="zh-CN" altLang="en-US"/>
-              <a:t>pip install -r requirements-dev.txt</a:t>
-            </a:r>
-            <a:endParaRPr lang="zh-CN" altLang="en-US"/>
-          </a:p>
-        </p:txBody>
-      </p:sp>
-    </p:spTree>
-    <p:custDataLst>
-      <p:tags r:id="rId1"/>
-    </p:custDataLst>
-  </p:cSld>
-  <p:clrMapOvr>
-    <a:masterClrMapping/>
-  </p:clrMapOvr>
-</p:sld>
-</file>
-
 <file path=ppt/slides/slide67.xml><?xml version="1.0" encoding="utf-8"?>
 <p:sld xmlns:a="http://schemas.openxmlformats.org/drawingml/2006/main" xmlns:r="http://schemas.openxmlformats.org/officeDocument/2006/relationships" xmlns:p="http://schemas.openxmlformats.org/presentationml/2006/main">
   <p:cSld>
@@ -21733,7 +22224,7 @@
           <a:p>
             <a:r>
               <a:rPr lang="en-US" altLang="zh-CN"/>
-              <a:t>Docker</a:t>
+              <a:t>CMS</a:t>
             </a:r>
             <a:endParaRPr lang="en-US" altLang="zh-CN"/>
           </a:p>
@@ -21794,7 +22285,7 @@
           <a:p>
             <a:r>
               <a:rPr lang="en-US" altLang="zh-CN"/>
-              <a:t>Tomcat</a:t>
+              <a:t>Lin CMS</a:t>
             </a:r>
             <a:endParaRPr lang="en-US" altLang="zh-CN"/>
           </a:p>
@@ -21813,90 +22304,176 @@
         <p:spPr>
           <a:xfrm>
             <a:off x="838200" y="1211580"/>
-            <a:ext cx="7153910" cy="4549140"/>
+            <a:ext cx="5467985" cy="4549140"/>
           </a:xfrm>
         </p:spPr>
         <p:txBody>
           <a:bodyPr>
-            <a:normAutofit/>
+            <a:normAutofit lnSpcReduction="10000"/>
           </a:bodyPr>
           <a:p>
             <a:r>
-              <a:rPr lang="en-US" altLang="zh-CN"/>
-              <a:t>References</a:t>
-            </a:r>
-            <a:endParaRPr lang="en-US" altLang="zh-CN"/>
-          </a:p>
-          <a:p>
-            <a:pPr lvl="1"/>
-            <a:r>
-              <a:rPr lang="en-US" altLang="zh-CN"/>
-              <a:t>https://blog.lukaspradel.com/dockerizing-a-tomcat-postgresql-java-web-application/</a:t>
-            </a:r>
-            <a:endParaRPr lang="en-US" altLang="zh-CN"/>
-          </a:p>
-          <a:p>
-            <a:pPr lvl="1"/>
-            <a:r>
-              <a:rPr lang="en-US" altLang="zh-CN"/>
-              <a:t>https://javatodev.com/docker-compose-spring-boot-postgresql/</a:t>
-            </a:r>
-            <a:endParaRPr lang="en-US" altLang="zh-CN"/>
-          </a:p>
-          <a:p>
-            <a:pPr lvl="1"/>
-            <a:r>
-              <a:rPr lang="en-US" altLang="zh-CN"/>
-              <a:t>https://github.com/bezkoder/docker-compose-spring-boot-postgres</a:t>
-            </a:r>
-            <a:endParaRPr lang="en-US" altLang="zh-CN"/>
-          </a:p>
-          <a:p>
-            <a:pPr lvl="1"/>
-            <a:r>
-              <a:rPr lang="en-US" altLang="zh-CN"/>
-              <a:t>https://juejin.cn/post/7176899356585361466</a:t>
-            </a:r>
-            <a:endParaRPr lang="en-US" altLang="zh-CN"/>
-          </a:p>
-          <a:p>
-            <a:r>
-              <a:rPr lang="en-US" altLang="zh-CN"/>
-              <a:t>Dockerfile</a:t>
-            </a:r>
-            <a:endParaRPr lang="en-US" altLang="zh-CN"/>
-          </a:p>
-          <a:p>
-            <a:pPr lvl="1"/>
-            <a:r>
-              <a:rPr lang="en-US" altLang="zh-CN"/>
-              <a:t>FROM tomcat</a:t>
-            </a:r>
-            <a:endParaRPr lang="en-US" altLang="zh-CN"/>
-          </a:p>
-          <a:p>
-            <a:pPr lvl="1"/>
-            <a:r>
-              <a:rPr lang="en-US" altLang="zh-CN"/>
-              <a:t>COPY ROOT.war /usr/local/tomcat/webapps/</a:t>
+              <a:rPr lang="zh-CN" altLang="en-US"/>
+              <a:t>https://github.com/TaleLin/lin-cms-flask</a:t>
+            </a:r>
+            <a:endParaRPr lang="zh-CN" altLang="en-US"/>
+          </a:p>
+          <a:p>
+            <a:pPr lvl="1"/>
+            <a:r>
+              <a:rPr lang="en-US" altLang="zh-CN"/>
+              <a:t>MIT</a:t>
+            </a:r>
+            <a:endParaRPr lang="en-US" altLang="zh-CN"/>
+          </a:p>
+          <a:p>
+            <a:pPr lvl="1"/>
+            <a:r>
+              <a:rPr lang="zh-CN" altLang="en-US"/>
+              <a:t>前后端分离</a:t>
+            </a:r>
+            <a:endParaRPr lang="zh-CN" altLang="en-US"/>
+          </a:p>
+          <a:p>
+            <a:pPr lvl="1"/>
+            <a:r>
+              <a:rPr lang="zh-CN" altLang="en-US"/>
+              <a:t>功能</a:t>
+            </a:r>
+            <a:endParaRPr lang="zh-CN" altLang="en-US"/>
+          </a:p>
+          <a:p>
+            <a:pPr lvl="2"/>
+            <a:r>
+              <a:rPr lang="zh-CN" altLang="en-US"/>
+              <a:t>内置了 CMS 中最为常见的需求：用户管理、权限管理、日志系统等</a:t>
+            </a:r>
+            <a:endParaRPr lang="zh-CN" altLang="en-US"/>
+          </a:p>
+          <a:p>
+            <a:pPr lvl="1"/>
+            <a:r>
+              <a:rPr lang="zh-CN" altLang="en-US"/>
+              <a:t>实现</a:t>
+            </a:r>
+            <a:endParaRPr lang="zh-CN" altLang="en-US"/>
+          </a:p>
+          <a:p>
+            <a:pPr lvl="2"/>
+            <a:r>
+              <a:rPr lang="zh-CN" altLang="en-US"/>
+              <a:t>后端：</a:t>
+            </a:r>
+            <a:r>
+              <a:rPr lang="en-US" altLang="zh-CN"/>
+              <a:t>flask</a:t>
+            </a:r>
+            <a:endParaRPr lang="en-US" altLang="zh-CN"/>
+          </a:p>
+          <a:p>
+            <a:pPr lvl="2"/>
+            <a:r>
+              <a:rPr lang="zh-CN" altLang="en-US"/>
+              <a:t>前端：</a:t>
+            </a:r>
+            <a:r>
+              <a:rPr lang="en-US" altLang="zh-CN"/>
+              <a:t>vue3</a:t>
+            </a:r>
+            <a:r>
+              <a:rPr lang="zh-CN" altLang="en-US"/>
+              <a:t>，</a:t>
+            </a:r>
+            <a:r>
+              <a:rPr lang="en-US" altLang="zh-CN"/>
+              <a:t>element plus</a:t>
             </a:r>
             <a:endParaRPr lang="en-US" altLang="zh-CN"/>
           </a:p>
           <a:p>
             <a:pPr lvl="0"/>
             <a:r>
-              <a:rPr lang="en-US" altLang="zh-CN"/>
-              <a:t>Docker compose</a:t>
-            </a:r>
-            <a:endParaRPr lang="en-US" altLang="zh-CN"/>
-          </a:p>
-          <a:p>
-            <a:pPr lvl="1"/>
-            <a:r>
-              <a:rPr lang="en-US" altLang="zh-CN"/>
-              <a:t>web, db</a:t>
-            </a:r>
-            <a:endParaRPr lang="en-US" altLang="zh-CN"/>
+              <a:rPr lang="zh-CN" altLang="en-US"/>
+              <a:t>后端</a:t>
+            </a:r>
+            <a:endParaRPr lang="zh-CN" altLang="en-US"/>
+          </a:p>
+          <a:p>
+            <a:pPr lvl="1"/>
+            <a:r>
+              <a:rPr lang="zh-CN" altLang="en-US"/>
+              <a:t>git clone https://github.com/TaleLin/lin-cms-flask.git starter</a:t>
+            </a:r>
+            <a:endParaRPr lang="zh-CN" altLang="en-US"/>
+          </a:p>
+          <a:p>
+            <a:pPr lvl="1"/>
+            <a:r>
+              <a:rPr lang="zh-CN" altLang="en-US"/>
+              <a:t>pip install -r requirements-dev.txt</a:t>
+            </a:r>
+            <a:endParaRPr lang="zh-CN" altLang="en-US"/>
+          </a:p>
+        </p:txBody>
+      </p:sp>
+    </p:spTree>
+    <p:custDataLst>
+      <p:tags r:id="rId1"/>
+    </p:custDataLst>
+  </p:cSld>
+  <p:clrMapOvr>
+    <a:masterClrMapping/>
+  </p:clrMapOvr>
+</p:sld>
+</file>
+
+<file path=ppt/slides/slide69.xml><?xml version="1.0" encoding="utf-8"?>
+<p:sld xmlns:a="http://schemas.openxmlformats.org/drawingml/2006/main" xmlns:r="http://schemas.openxmlformats.org/officeDocument/2006/relationships" xmlns:p="http://schemas.openxmlformats.org/presentationml/2006/main">
+  <p:cSld>
+    <p:spTree>
+      <p:nvGrpSpPr>
+        <p:cNvPr id="1" name=""/>
+        <p:cNvGrpSpPr/>
+        <p:nvPr/>
+      </p:nvGrpSpPr>
+      <p:grpSpPr/>
+      <p:sp>
+        <p:nvSpPr>
+          <p:cNvPr id="4" name="标题 3"/>
+          <p:cNvSpPr>
+            <a:spLocks noGrp="1"/>
+          </p:cNvSpPr>
+          <p:nvPr>
+            <p:ph type="title"/>
+          </p:nvPr>
+        </p:nvSpPr>
+        <p:spPr/>
+        <p:txBody>
+          <a:bodyPr/>
+          <a:p>
+            <a:r>
+              <a:rPr lang="en-US" altLang="zh-CN"/>
+              <a:t>Docker</a:t>
+            </a:r>
+            <a:endParaRPr lang="en-US" altLang="zh-CN"/>
+          </a:p>
+        </p:txBody>
+      </p:sp>
+      <p:sp>
+        <p:nvSpPr>
+          <p:cNvPr id="5" name="文本占位符 4"/>
+          <p:cNvSpPr>
+            <a:spLocks noGrp="1"/>
+          </p:cNvSpPr>
+          <p:nvPr>
+            <p:ph type="body" idx="1"/>
+          </p:nvPr>
+        </p:nvSpPr>
+        <p:spPr/>
+        <p:txBody>
+          <a:bodyPr/>
+          <a:p>
+            <a:endParaRPr lang="zh-CN" altLang="en-US"/>
           </a:p>
         </p:txBody>
       </p:sp>
@@ -21968,6 +22545,917 @@
             <a:r>
               <a:rPr lang="en-US" altLang="zh-CN"/>
               <a:t>mkfs.ext4 /dev/vdb</a:t>
+            </a:r>
+            <a:endParaRPr lang="en-US" altLang="zh-CN"/>
+          </a:p>
+          <a:p>
+            <a:pPr lvl="0"/>
+            <a:r>
+              <a:rPr lang="zh-CN" altLang="en-US"/>
+              <a:t>复制</a:t>
+            </a:r>
+            <a:r>
+              <a:rPr lang="zh-CN" altLang="en-US"/>
+              <a:t>数据</a:t>
+            </a:r>
+            <a:endParaRPr lang="zh-CN" altLang="en-US"/>
+          </a:p>
+          <a:p>
+            <a:pPr lvl="1"/>
+            <a:r>
+              <a:rPr lang="en-US" altLang="zh-CN"/>
+              <a:t>screen -S copy_data</a:t>
+            </a:r>
+            <a:endParaRPr lang="en-US" altLang="zh-CN"/>
+          </a:p>
+          <a:p>
+            <a:pPr lvl="1"/>
+            <a:r>
+              <a:rPr lang="en-US" altLang="zh-CN"/>
+              <a:t>sudo rsync -avxHAX --progress /data/ /data2/</a:t>
+            </a:r>
+            <a:endParaRPr lang="en-US" altLang="zh-CN"/>
+          </a:p>
+          <a:p>
+            <a:pPr lvl="1"/>
+            <a:r>
+              <a:rPr lang="en-US" altLang="zh-CN"/>
+              <a:t>Ctrl-z</a:t>
+            </a:r>
+            <a:endParaRPr lang="en-US" altLang="zh-CN"/>
+          </a:p>
+          <a:p>
+            <a:pPr lvl="1"/>
+            <a:r>
+              <a:rPr lang="en-US" altLang="zh-CN"/>
+              <a:t>bg</a:t>
+            </a:r>
+            <a:endParaRPr lang="en-US" altLang="zh-CN"/>
+          </a:p>
+          <a:p>
+            <a:pPr lvl="1"/>
+            <a:r>
+              <a:rPr lang="en-US" altLang="zh-CN"/>
+              <a:t>screen -r copy_data</a:t>
+            </a:r>
+            <a:r>
+              <a:rPr lang="en-US" altLang="zh-CN" b="1"/>
+              <a:t>	</a:t>
+            </a:r>
+            <a:r>
+              <a:rPr lang="en-US" altLang="zh-CN"/>
+              <a:t># recover</a:t>
+            </a:r>
+            <a:endParaRPr lang="en-US" altLang="zh-CN"/>
+          </a:p>
+        </p:txBody>
+      </p:sp>
+    </p:spTree>
+    <p:custDataLst>
+      <p:tags r:id="rId1"/>
+    </p:custDataLst>
+  </p:cSld>
+  <p:clrMapOvr>
+    <a:masterClrMapping/>
+  </p:clrMapOvr>
+</p:sld>
+</file>
+
+<file path=ppt/slides/slide70.xml><?xml version="1.0" encoding="utf-8"?>
+<p:sld xmlns:a="http://schemas.openxmlformats.org/drawingml/2006/main" xmlns:r="http://schemas.openxmlformats.org/officeDocument/2006/relationships" xmlns:p="http://schemas.openxmlformats.org/presentationml/2006/main">
+  <p:cSld>
+    <p:spTree>
+      <p:nvGrpSpPr>
+        <p:cNvPr id="1" name=""/>
+        <p:cNvGrpSpPr/>
+        <p:nvPr/>
+      </p:nvGrpSpPr>
+      <p:grpSpPr/>
+      <p:sp>
+        <p:nvSpPr>
+          <p:cNvPr id="4" name="标题 3"/>
+          <p:cNvSpPr>
+            <a:spLocks noGrp="1"/>
+          </p:cNvSpPr>
+          <p:nvPr>
+            <p:ph type="title"/>
+          </p:nvPr>
+        </p:nvSpPr>
+        <p:spPr/>
+        <p:txBody>
+          <a:bodyPr/>
+          <a:p>
+            <a:r>
+              <a:rPr lang="en-US" altLang="zh-CN"/>
+              <a:t>Tomcat</a:t>
+            </a:r>
+            <a:endParaRPr lang="en-US" altLang="zh-CN"/>
+          </a:p>
+        </p:txBody>
+      </p:sp>
+      <p:sp>
+        <p:nvSpPr>
+          <p:cNvPr id="5" name="内容占位符 4"/>
+          <p:cNvSpPr>
+            <a:spLocks noGrp="1"/>
+          </p:cNvSpPr>
+          <p:nvPr>
+            <p:ph idx="1"/>
+          </p:nvPr>
+        </p:nvSpPr>
+        <p:spPr>
+          <a:xfrm>
+            <a:off x="838200" y="1211580"/>
+            <a:ext cx="7153910" cy="4549140"/>
+          </a:xfrm>
+        </p:spPr>
+        <p:txBody>
+          <a:bodyPr>
+            <a:normAutofit/>
+          </a:bodyPr>
+          <a:p>
+            <a:r>
+              <a:rPr lang="en-US" altLang="zh-CN"/>
+              <a:t>References</a:t>
+            </a:r>
+            <a:endParaRPr lang="en-US" altLang="zh-CN"/>
+          </a:p>
+          <a:p>
+            <a:pPr lvl="1"/>
+            <a:r>
+              <a:rPr lang="en-US" altLang="zh-CN"/>
+              <a:t>https://blog.lukaspradel.com/dockerizing-a-tomcat-postgresql-java-web-application/</a:t>
+            </a:r>
+            <a:endParaRPr lang="en-US" altLang="zh-CN"/>
+          </a:p>
+          <a:p>
+            <a:pPr lvl="1"/>
+            <a:r>
+              <a:rPr lang="en-US" altLang="zh-CN"/>
+              <a:t>https://javatodev.com/docker-compose-spring-boot-postgresql/</a:t>
+            </a:r>
+            <a:endParaRPr lang="en-US" altLang="zh-CN"/>
+          </a:p>
+          <a:p>
+            <a:pPr lvl="1"/>
+            <a:r>
+              <a:rPr lang="en-US" altLang="zh-CN"/>
+              <a:t>https://github.com/bezkoder/docker-compose-spring-boot-postgres</a:t>
+            </a:r>
+            <a:endParaRPr lang="en-US" altLang="zh-CN"/>
+          </a:p>
+          <a:p>
+            <a:pPr lvl="1"/>
+            <a:r>
+              <a:rPr lang="en-US" altLang="zh-CN"/>
+              <a:t>https://juejin.cn/post/7176899356585361466</a:t>
+            </a:r>
+            <a:endParaRPr lang="en-US" altLang="zh-CN"/>
+          </a:p>
+          <a:p>
+            <a:r>
+              <a:rPr lang="en-US" altLang="zh-CN"/>
+              <a:t>Dockerfile</a:t>
+            </a:r>
+            <a:endParaRPr lang="en-US" altLang="zh-CN"/>
+          </a:p>
+          <a:p>
+            <a:pPr lvl="1"/>
+            <a:r>
+              <a:rPr lang="en-US" altLang="zh-CN"/>
+              <a:t>FROM tomcat</a:t>
+            </a:r>
+            <a:endParaRPr lang="en-US" altLang="zh-CN"/>
+          </a:p>
+          <a:p>
+            <a:pPr lvl="1"/>
+            <a:r>
+              <a:rPr lang="en-US" altLang="zh-CN"/>
+              <a:t>COPY ROOT.war /usr/local/tomcat/webapps/</a:t>
+            </a:r>
+            <a:endParaRPr lang="en-US" altLang="zh-CN"/>
+          </a:p>
+          <a:p>
+            <a:pPr lvl="0"/>
+            <a:r>
+              <a:rPr lang="en-US" altLang="zh-CN"/>
+              <a:t>Docker compose</a:t>
+            </a:r>
+            <a:endParaRPr lang="en-US" altLang="zh-CN"/>
+          </a:p>
+          <a:p>
+            <a:pPr lvl="1"/>
+            <a:r>
+              <a:rPr lang="en-US" altLang="zh-CN"/>
+              <a:t>web, db</a:t>
+            </a:r>
+            <a:endParaRPr lang="en-US" altLang="zh-CN"/>
+          </a:p>
+        </p:txBody>
+      </p:sp>
+    </p:spTree>
+    <p:custDataLst>
+      <p:tags r:id="rId1"/>
+    </p:custDataLst>
+  </p:cSld>
+  <p:clrMapOvr>
+    <a:masterClrMapping/>
+  </p:clrMapOvr>
+</p:sld>
+</file>
+
+<file path=ppt/slides/slide71.xml><?xml version="1.0" encoding="utf-8"?>
+<p:sld xmlns:a="http://schemas.openxmlformats.org/drawingml/2006/main" xmlns:r="http://schemas.openxmlformats.org/officeDocument/2006/relationships" xmlns:p="http://schemas.openxmlformats.org/presentationml/2006/main">
+  <p:cSld>
+    <p:spTree>
+      <p:nvGrpSpPr>
+        <p:cNvPr id="1" name=""/>
+        <p:cNvGrpSpPr/>
+        <p:nvPr/>
+      </p:nvGrpSpPr>
+      <p:grpSpPr/>
+      <p:sp>
+        <p:nvSpPr>
+          <p:cNvPr id="4" name="标题 3"/>
+          <p:cNvSpPr>
+            <a:spLocks noGrp="1"/>
+          </p:cNvSpPr>
+          <p:nvPr>
+            <p:ph type="title"/>
+          </p:nvPr>
+        </p:nvSpPr>
+        <p:spPr/>
+        <p:txBody>
+          <a:bodyPr/>
+          <a:p>
+            <a:r>
+              <a:rPr lang="en-US" altLang="zh-CN"/>
+              <a:t>Statistics</a:t>
+            </a:r>
+            <a:endParaRPr lang="en-US" altLang="zh-CN"/>
+          </a:p>
+        </p:txBody>
+      </p:sp>
+      <p:sp>
+        <p:nvSpPr>
+          <p:cNvPr id="5" name="文本占位符 4"/>
+          <p:cNvSpPr>
+            <a:spLocks noGrp="1"/>
+          </p:cNvSpPr>
+          <p:nvPr>
+            <p:ph type="body" idx="1"/>
+          </p:nvPr>
+        </p:nvSpPr>
+        <p:spPr/>
+        <p:txBody>
+          <a:bodyPr/>
+          <a:p>
+            <a:endParaRPr lang="zh-CN" altLang="en-US"/>
+          </a:p>
+        </p:txBody>
+      </p:sp>
+    </p:spTree>
+    <p:custDataLst>
+      <p:tags r:id="rId1"/>
+    </p:custDataLst>
+  </p:cSld>
+  <p:clrMapOvr>
+    <a:masterClrMapping/>
+  </p:clrMapOvr>
+</p:sld>
+</file>
+
+<file path=ppt/slides/slide72.xml><?xml version="1.0" encoding="utf-8"?>
+<p:sld xmlns:a="http://schemas.openxmlformats.org/drawingml/2006/main" xmlns:r="http://schemas.openxmlformats.org/officeDocument/2006/relationships" xmlns:p="http://schemas.openxmlformats.org/presentationml/2006/main">
+  <p:cSld>
+    <p:spTree>
+      <p:nvGrpSpPr>
+        <p:cNvPr id="1" name=""/>
+        <p:cNvGrpSpPr/>
+        <p:nvPr/>
+      </p:nvGrpSpPr>
+      <p:grpSpPr/>
+      <p:sp>
+        <p:nvSpPr>
+          <p:cNvPr id="2" name="标题 1"/>
+          <p:cNvSpPr>
+            <a:spLocks noGrp="1"/>
+          </p:cNvSpPr>
+          <p:nvPr>
+            <p:ph type="title"/>
+          </p:nvPr>
+        </p:nvSpPr>
+        <p:spPr/>
+        <p:txBody>
+          <a:bodyPr/>
+          <a:p>
+            <a:r>
+              <a:rPr lang="en-US" altLang="zh-CN"/>
+              <a:t>Matomo</a:t>
+            </a:r>
+            <a:endParaRPr lang="en-US" altLang="zh-CN"/>
+          </a:p>
+        </p:txBody>
+      </p:sp>
+      <p:sp>
+        <p:nvSpPr>
+          <p:cNvPr id="3" name="内容占位符 2"/>
+          <p:cNvSpPr>
+            <a:spLocks noGrp="1"/>
+          </p:cNvSpPr>
+          <p:nvPr>
+            <p:ph idx="1"/>
+          </p:nvPr>
+        </p:nvSpPr>
+        <p:spPr>
+          <a:xfrm>
+            <a:off x="838200" y="1211580"/>
+            <a:ext cx="4354195" cy="5324475"/>
+          </a:xfrm>
+        </p:spPr>
+        <p:txBody>
+          <a:bodyPr>
+            <a:noAutofit/>
+          </a:bodyPr>
+          <a:p>
+            <a:r>
+              <a:rPr lang="en-US" altLang="zh-CN" sz="1000"/>
+              <a:t>References</a:t>
+            </a:r>
+            <a:endParaRPr lang="en-US" altLang="zh-CN" sz="1000"/>
+          </a:p>
+          <a:p>
+            <a:pPr lvl="1"/>
+            <a:r>
+              <a:rPr lang="en-US" altLang="zh-CN" sz="900"/>
+              <a:t>https://github.com/matomo-org/matomo</a:t>
+            </a:r>
+            <a:endParaRPr lang="en-US" altLang="zh-CN" sz="900"/>
+          </a:p>
+          <a:p>
+            <a:pPr lvl="1"/>
+            <a:r>
+              <a:rPr lang="en-US" altLang="zh-CN" sz="900"/>
+              <a:t>https://zhuanlan.zhihu.com/p/32849835104</a:t>
+            </a:r>
+            <a:endParaRPr lang="en-US" altLang="zh-CN" sz="900"/>
+          </a:p>
+          <a:p>
+            <a:pPr lvl="0"/>
+            <a:r>
+              <a:rPr lang="en-US" altLang="zh-CN" sz="1000"/>
+              <a:t>Steps</a:t>
+            </a:r>
+            <a:endParaRPr lang="en-US" altLang="zh-CN" sz="1000"/>
+          </a:p>
+          <a:p>
+            <a:pPr lvl="1"/>
+            <a:r>
+              <a:rPr lang="en-US" altLang="zh-CN" sz="900"/>
+              <a:t>start service using docker-compose.yml from https://github.com/matomo-org/docker/blob/master/.examples/nginx/compose.yml</a:t>
+            </a:r>
+            <a:endParaRPr lang="en-US" altLang="zh-CN" sz="900"/>
+          </a:p>
+          <a:p>
+            <a:pPr lvl="1"/>
+            <a:r>
+              <a:rPr lang="en-US" altLang="zh-CN" sz="900"/>
+              <a:t>open page at http://server:8080</a:t>
+            </a:r>
+            <a:endParaRPr lang="en-US" altLang="zh-CN" sz="900"/>
+          </a:p>
+          <a:p>
+            <a:pPr lvl="1"/>
+            <a:r>
+              <a:rPr lang="en-US" altLang="zh-CN" sz="900"/>
+              <a:t>change settings in web page</a:t>
+            </a:r>
+            <a:endParaRPr lang="en-US" altLang="zh-CN" sz="900"/>
+          </a:p>
+          <a:p>
+            <a:pPr lvl="0"/>
+            <a:r>
+              <a:rPr lang="en-US" altLang="zh-CN" sz="1200"/>
+              <a:t>Intro</a:t>
+            </a:r>
+            <a:endParaRPr lang="en-US" altLang="zh-CN" sz="1200"/>
+          </a:p>
+          <a:p>
+            <a:pPr lvl="1"/>
+            <a:r>
+              <a:rPr lang="en-US" altLang="zh-CN" sz="900"/>
+              <a:t>web/config/config.ini.php</a:t>
+            </a:r>
+            <a:endParaRPr lang="en-US" altLang="zh-CN" sz="900"/>
+          </a:p>
+          <a:p>
+            <a:pPr lvl="1"/>
+            <a:r>
+              <a:rPr lang="en-US" altLang="zh-CN" sz="900"/>
+              <a:t>Electron</a:t>
+            </a:r>
+            <a:endParaRPr lang="en-US" altLang="zh-CN" sz="900"/>
+          </a:p>
+          <a:p>
+            <a:pPr lvl="2"/>
+            <a:r>
+              <a:rPr lang="en-US" altLang="zh-CN" sz="800"/>
+              <a:t>_paq.push(['enableFileTracking']);</a:t>
+            </a:r>
+            <a:endParaRPr lang="en-US" altLang="zh-CN" sz="800"/>
+          </a:p>
+          <a:p>
+            <a:pPr lvl="2"/>
+            <a:r>
+              <a:rPr lang="en-US" altLang="zh-CN" sz="800"/>
+              <a:t>_paq.push(['disableCookies']);</a:t>
+            </a:r>
+            <a:endParaRPr lang="en-US" altLang="zh-CN" sz="800"/>
+          </a:p>
+          <a:p>
+            <a:pPr lvl="1"/>
+            <a:r>
+              <a:rPr lang="en-US" altLang="zh-CN" sz="900"/>
+              <a:t> read/write cookies to track visitors</a:t>
+            </a:r>
+            <a:endParaRPr lang="en-US" altLang="zh-CN" sz="900"/>
+          </a:p>
+          <a:p>
+            <a:pPr lvl="0"/>
+            <a:r>
+              <a:rPr lang="en-US" altLang="zh-CN" sz="1200"/>
+              <a:t>Usage</a:t>
+            </a:r>
+            <a:endParaRPr lang="en-US" altLang="zh-CN" sz="1200"/>
+          </a:p>
+          <a:p>
+            <a:pPr lvl="1"/>
+            <a:r>
+              <a:rPr lang="en-US" altLang="zh-CN" sz="900"/>
+              <a:t>matomo-tracker</a:t>
+            </a:r>
+            <a:endParaRPr lang="en-US" altLang="zh-CN" sz="900"/>
+          </a:p>
+          <a:p>
+            <a:pPr lvl="2"/>
+            <a:r>
+              <a:rPr lang="en-US" altLang="zh-CN" sz="800"/>
+              <a:t>npm i matomo-tracker</a:t>
+            </a:r>
+            <a:endParaRPr lang="en-US" altLang="zh-CN" sz="800"/>
+          </a:p>
+          <a:p>
+            <a:pPr lvl="2"/>
+            <a:r>
+              <a:rPr lang="en-US" altLang="zh-CN" sz="800"/>
+              <a:t>const MatomoTracker = require('matomo-tracker')</a:t>
+            </a:r>
+            <a:endParaRPr lang="en-US" altLang="zh-CN" sz="800"/>
+          </a:p>
+          <a:p>
+            <a:pPr lvl="2"/>
+            <a:r>
+              <a:rPr lang="en-US" altLang="zh-CN" sz="800"/>
+              <a:t>const tracker = new MatomoTracker(1, 'http://101.35.115.17:6680/matomo.php')</a:t>
+            </a:r>
+            <a:endParaRPr lang="en-US" altLang="zh-CN" sz="800"/>
+          </a:p>
+          <a:p>
+            <a:pPr lvl="2"/>
+            <a:r>
+              <a:rPr lang="en-US" altLang="zh-CN" sz="800"/>
+              <a:t>tracker.track({url: 'app://main-window', action_name: 'Main Window Loaded'})</a:t>
+            </a:r>
+            <a:endParaRPr lang="en-US" altLang="zh-CN" sz="800"/>
+          </a:p>
+          <a:p>
+            <a:pPr lvl="1"/>
+            <a:r>
+              <a:rPr lang="en-US" altLang="zh-CN" sz="900"/>
+              <a:t>Track page view</a:t>
+            </a:r>
+            <a:endParaRPr lang="en-US" altLang="zh-CN" sz="900"/>
+          </a:p>
+          <a:p>
+            <a:pPr lvl="2"/>
+            <a:r>
+              <a:rPr lang="en-US" altLang="zh-CN" sz="800"/>
+              <a:t>_paq.push(['trackPageView', document.title])</a:t>
+            </a:r>
+            <a:endParaRPr lang="en-US" altLang="zh-CN" sz="800"/>
+          </a:p>
+          <a:p>
+            <a:pPr lvl="1"/>
+            <a:r>
+              <a:rPr lang="en-US" altLang="zh-CN" sz="900"/>
+              <a:t>Track user event</a:t>
+            </a:r>
+            <a:endParaRPr lang="en-US" altLang="zh-CN" sz="900"/>
+          </a:p>
+          <a:p>
+            <a:pPr lvl="2"/>
+            <a:r>
+              <a:rPr lang="en-US" altLang="zh-CN" sz="800"/>
+              <a:t>_paq.push(['trackEvent', 'Category', 'Action', 'Name', 'Value'])</a:t>
+            </a:r>
+            <a:endParaRPr lang="en-US" altLang="zh-CN" sz="900"/>
+          </a:p>
+        </p:txBody>
+      </p:sp>
+      <p:pic>
+        <p:nvPicPr>
+          <p:cNvPr id="5" name="图片 4"/>
+          <p:cNvPicPr/>
+          <p:nvPr/>
+        </p:nvPicPr>
+        <p:blipFill>
+          <a:blip r:embed="rId1"/>
+          <a:stretch>
+            <a:fillRect/>
+          </a:stretch>
+        </p:blipFill>
+        <p:spPr>
+          <a:xfrm>
+            <a:off x="9928860" y="245110"/>
+            <a:ext cx="1690370" cy="3183890"/>
+          </a:xfrm>
+          <a:prstGeom prst="rect">
+            <a:avLst/>
+          </a:prstGeom>
+        </p:spPr>
+      </p:pic>
+      <p:sp>
+        <p:nvSpPr>
+          <p:cNvPr id="4" name="内容占位符 2"/>
+          <p:cNvSpPr>
+            <a:spLocks noGrp="1"/>
+          </p:cNvSpPr>
+          <p:nvPr/>
+        </p:nvSpPr>
+        <p:spPr>
+          <a:xfrm>
+            <a:off x="5383530" y="1211580"/>
+            <a:ext cx="4354195" cy="5324475"/>
+          </a:xfrm>
+          <a:prstGeom prst="rect">
+            <a:avLst/>
+          </a:prstGeom>
+        </p:spPr>
+        <p:txBody>
+          <a:bodyPr vert="horz" lIns="91440" tIns="45720" rIns="91440" bIns="45720" rtlCol="0">
+            <a:noAutofit/>
+          </a:bodyPr>
+          <a:lstStyle>
+            <a:lvl1pPr marL="342900" indent="-342900" algn="l" defTabSz="914400" rtl="0" eaLnBrk="1" latinLnBrk="0" hangingPunct="1">
+              <a:lnSpc>
+                <a:spcPct val="90000"/>
+              </a:lnSpc>
+              <a:spcBef>
+                <a:spcPts val="1000"/>
+              </a:spcBef>
+              <a:buFont typeface="黑体" panose="02010609060101010101" charset="-122"/>
+              <a:buChar char="〉"/>
+              <a:defRPr sz="2400" kern="1200">
+                <a:solidFill>
+                  <a:schemeClr val="tx1"/>
+                </a:solidFill>
+                <a:latin typeface="+mn-lt"/>
+                <a:ea typeface="+mn-ea"/>
+                <a:cs typeface="+mn-cs"/>
+              </a:defRPr>
+            </a:lvl1pPr>
+            <a:lvl2pPr marL="800100" indent="-342900" algn="l" defTabSz="914400" rtl="0" eaLnBrk="1" latinLnBrk="0" hangingPunct="1">
+              <a:lnSpc>
+                <a:spcPct val="90000"/>
+              </a:lnSpc>
+              <a:spcBef>
+                <a:spcPts val="500"/>
+              </a:spcBef>
+              <a:buFont typeface="Arial" panose="020B0604020202020204" pitchFamily="34" charset="0"/>
+              <a:buChar char="•"/>
+              <a:defRPr sz="2000" kern="1200">
+                <a:solidFill>
+                  <a:schemeClr val="tx1"/>
+                </a:solidFill>
+                <a:latin typeface="+mn-lt"/>
+                <a:ea typeface="+mn-ea"/>
+                <a:cs typeface="+mn-cs"/>
+              </a:defRPr>
+            </a:lvl2pPr>
+            <a:lvl3pPr marL="1257300" indent="-342900" algn="l" defTabSz="914400" rtl="0" eaLnBrk="1" latinLnBrk="0" hangingPunct="1">
+              <a:lnSpc>
+                <a:spcPct val="90000"/>
+              </a:lnSpc>
+              <a:spcBef>
+                <a:spcPts val="500"/>
+              </a:spcBef>
+              <a:buFont typeface="Arial" panose="020B0604020202020204" pitchFamily="34" charset="0"/>
+              <a:buChar char="•"/>
+              <a:defRPr sz="1800" kern="1200">
+                <a:solidFill>
+                  <a:schemeClr val="tx1"/>
+                </a:solidFill>
+                <a:latin typeface="+mn-lt"/>
+                <a:ea typeface="+mn-ea"/>
+                <a:cs typeface="+mn-cs"/>
+              </a:defRPr>
+            </a:lvl3pPr>
+            <a:lvl4pPr marL="1657350" indent="-285750" algn="l" defTabSz="914400" rtl="0" eaLnBrk="1" latinLnBrk="0" hangingPunct="1">
+              <a:lnSpc>
+                <a:spcPct val="90000"/>
+              </a:lnSpc>
+              <a:spcBef>
+                <a:spcPts val="500"/>
+              </a:spcBef>
+              <a:buFont typeface="Arial" panose="020B0604020202020204" pitchFamily="34" charset="0"/>
+              <a:buChar char="•"/>
+              <a:defRPr sz="1800" kern="1200">
+                <a:solidFill>
+                  <a:schemeClr val="tx1"/>
+                </a:solidFill>
+                <a:latin typeface="+mn-lt"/>
+                <a:ea typeface="+mn-ea"/>
+                <a:cs typeface="+mn-cs"/>
+              </a:defRPr>
+            </a:lvl4pPr>
+            <a:lvl5pPr marL="2114550" indent="-285750" algn="l" defTabSz="914400" rtl="0" eaLnBrk="1" latinLnBrk="0" hangingPunct="1">
+              <a:lnSpc>
+                <a:spcPct val="90000"/>
+              </a:lnSpc>
+              <a:spcBef>
+                <a:spcPts val="500"/>
+              </a:spcBef>
+              <a:buFont typeface="Arial" panose="020B0604020202020204" pitchFamily="34" charset="0"/>
+              <a:buChar char="•"/>
+              <a:defRPr sz="1800" kern="1200">
+                <a:solidFill>
+                  <a:schemeClr val="tx1"/>
+                </a:solidFill>
+                <a:latin typeface="+mn-lt"/>
+                <a:ea typeface="+mn-ea"/>
+                <a:cs typeface="+mn-cs"/>
+              </a:defRPr>
+            </a:lvl5pPr>
+            <a:lvl6pPr marL="2514600" indent="-228600" algn="l" defTabSz="914400" rtl="0" eaLnBrk="1" latinLnBrk="0" hangingPunct="1">
+              <a:lnSpc>
+                <a:spcPct val="90000"/>
+              </a:lnSpc>
+              <a:spcBef>
+                <a:spcPts val="500"/>
+              </a:spcBef>
+              <a:buFont typeface="Arial" panose="020B0604020202020204" pitchFamily="34" charset="0"/>
+              <a:buChar char="•"/>
+              <a:defRPr sz="1800" kern="1200">
+                <a:solidFill>
+                  <a:schemeClr val="tx1"/>
+                </a:solidFill>
+                <a:latin typeface="+mn-lt"/>
+                <a:ea typeface="+mn-ea"/>
+                <a:cs typeface="+mn-cs"/>
+              </a:defRPr>
+            </a:lvl6pPr>
+            <a:lvl7pPr marL="2971800" indent="-228600" algn="l" defTabSz="914400" rtl="0" eaLnBrk="1" latinLnBrk="0" hangingPunct="1">
+              <a:lnSpc>
+                <a:spcPct val="90000"/>
+              </a:lnSpc>
+              <a:spcBef>
+                <a:spcPts val="500"/>
+              </a:spcBef>
+              <a:buFont typeface="Arial" panose="020B0604020202020204" pitchFamily="34" charset="0"/>
+              <a:buChar char="•"/>
+              <a:defRPr sz="1800" kern="1200">
+                <a:solidFill>
+                  <a:schemeClr val="tx1"/>
+                </a:solidFill>
+                <a:latin typeface="+mn-lt"/>
+                <a:ea typeface="+mn-ea"/>
+                <a:cs typeface="+mn-cs"/>
+              </a:defRPr>
+            </a:lvl7pPr>
+            <a:lvl8pPr marL="3429000" indent="-228600" algn="l" defTabSz="914400" rtl="0" eaLnBrk="1" latinLnBrk="0" hangingPunct="1">
+              <a:lnSpc>
+                <a:spcPct val="90000"/>
+              </a:lnSpc>
+              <a:spcBef>
+                <a:spcPts val="500"/>
+              </a:spcBef>
+              <a:buFont typeface="Arial" panose="020B0604020202020204" pitchFamily="34" charset="0"/>
+              <a:buChar char="•"/>
+              <a:defRPr sz="1800" kern="1200">
+                <a:solidFill>
+                  <a:schemeClr val="tx1"/>
+                </a:solidFill>
+                <a:latin typeface="+mn-lt"/>
+                <a:ea typeface="+mn-ea"/>
+                <a:cs typeface="+mn-cs"/>
+              </a:defRPr>
+            </a:lvl8pPr>
+            <a:lvl9pPr marL="3886200" indent="-228600" algn="l" defTabSz="914400" rtl="0" eaLnBrk="1" latinLnBrk="0" hangingPunct="1">
+              <a:lnSpc>
+                <a:spcPct val="90000"/>
+              </a:lnSpc>
+              <a:spcBef>
+                <a:spcPts val="500"/>
+              </a:spcBef>
+              <a:buFont typeface="Arial" panose="020B0604020202020204" pitchFamily="34" charset="0"/>
+              <a:buChar char="•"/>
+              <a:defRPr sz="1800" kern="1200">
+                <a:solidFill>
+                  <a:schemeClr val="tx1"/>
+                </a:solidFill>
+                <a:latin typeface="+mn-lt"/>
+                <a:ea typeface="+mn-ea"/>
+                <a:cs typeface="+mn-cs"/>
+              </a:defRPr>
+            </a:lvl9pPr>
+          </a:lstStyle>
+          <a:p>
+            <a:pPr lvl="0"/>
+            <a:r>
+              <a:rPr lang="en-US" altLang="zh-CN" sz="1200"/>
+              <a:t>Docker</a:t>
+            </a:r>
+            <a:endParaRPr lang="en-US" altLang="zh-CN" sz="1200"/>
+          </a:p>
+          <a:p>
+            <a:pPr lvl="1"/>
+            <a:r>
+              <a:rPr lang="en-US" altLang="zh-CN" sz="900"/>
+              <a:t>sudo docker logs matomo-cron</a:t>
+            </a:r>
+            <a:endParaRPr lang="en-US" altLang="zh-CN" sz="900"/>
+          </a:p>
+          <a:p>
+            <a:pPr lvl="1"/>
+            <a:r>
+              <a:rPr lang="en-US" altLang="zh-CN" sz="900"/>
+              <a:t>sudo docker exec matomo-cron php /var/www/html/console core:archive --url=http://your-matomo-domain.com</a:t>
+            </a:r>
+            <a:endParaRPr lang="en-US" altLang="zh-CN" sz="900"/>
+          </a:p>
+          <a:p>
+            <a:pPr lvl="1"/>
+            <a:r>
+              <a:rPr lang="en-US" altLang="zh-CN" sz="900"/>
+              <a:t>sudo docker exec -it matomo_db mysql -u matomo -p matomo</a:t>
+            </a:r>
+            <a:endParaRPr lang="en-US" altLang="zh-CN" sz="900"/>
+          </a:p>
+        </p:txBody>
+      </p:sp>
+    </p:spTree>
+    <p:custDataLst>
+      <p:tags r:id="rId2"/>
+    </p:custDataLst>
+  </p:cSld>
+  <p:clrMapOvr>
+    <a:masterClrMapping/>
+  </p:clrMapOvr>
+</p:sld>
+</file>
+
+<file path=ppt/slides/slide73.xml><?xml version="1.0" encoding="utf-8"?>
+<p:sld xmlns:a="http://schemas.openxmlformats.org/drawingml/2006/main" xmlns:r="http://schemas.openxmlformats.org/officeDocument/2006/relationships" xmlns:p="http://schemas.openxmlformats.org/presentationml/2006/main">
+  <p:cSld>
+    <p:spTree>
+      <p:nvGrpSpPr>
+        <p:cNvPr id="1" name=""/>
+        <p:cNvGrpSpPr/>
+        <p:nvPr/>
+      </p:nvGrpSpPr>
+      <p:grpSpPr/>
+      <p:sp>
+        <p:nvSpPr>
+          <p:cNvPr id="6" name="标题 5"/>
+          <p:cNvSpPr>
+            <a:spLocks noGrp="1"/>
+          </p:cNvSpPr>
+          <p:nvPr>
+            <p:ph type="title"/>
+          </p:nvPr>
+        </p:nvSpPr>
+        <p:spPr/>
+        <p:txBody>
+          <a:bodyPr/>
+          <a:p>
+            <a:r>
+              <a:rPr lang="en-US" altLang="zh-CN"/>
+              <a:t>Security</a:t>
+            </a:r>
+            <a:endParaRPr lang="en-US" altLang="zh-CN"/>
+          </a:p>
+        </p:txBody>
+      </p:sp>
+      <p:sp>
+        <p:nvSpPr>
+          <p:cNvPr id="7" name="文本占位符 6"/>
+          <p:cNvSpPr>
+            <a:spLocks noGrp="1"/>
+          </p:cNvSpPr>
+          <p:nvPr>
+            <p:ph type="body" idx="1"/>
+          </p:nvPr>
+        </p:nvSpPr>
+        <p:spPr/>
+        <p:txBody>
+          <a:bodyPr/>
+          <a:p>
+            <a:endParaRPr lang="zh-CN" altLang="en-US"/>
+          </a:p>
+        </p:txBody>
+      </p:sp>
+    </p:spTree>
+    <p:custDataLst>
+      <p:tags r:id="rId1"/>
+    </p:custDataLst>
+  </p:cSld>
+  <p:clrMapOvr>
+    <a:masterClrMapping/>
+  </p:clrMapOvr>
+</p:sld>
+</file>
+
+<file path=ppt/slides/slide74.xml><?xml version="1.0" encoding="utf-8"?>
+<p:sld xmlns:a="http://schemas.openxmlformats.org/drawingml/2006/main" xmlns:r="http://schemas.openxmlformats.org/officeDocument/2006/relationships" xmlns:p="http://schemas.openxmlformats.org/presentationml/2006/main">
+  <p:cSld>
+    <p:spTree>
+      <p:nvGrpSpPr>
+        <p:cNvPr id="1" name=""/>
+        <p:cNvGrpSpPr/>
+        <p:nvPr/>
+      </p:nvGrpSpPr>
+      <p:grpSpPr/>
+      <p:sp>
+        <p:nvSpPr>
+          <p:cNvPr id="2" name="标题 1"/>
+          <p:cNvSpPr>
+            <a:spLocks noGrp="1"/>
+          </p:cNvSpPr>
+          <p:nvPr>
+            <p:ph type="title"/>
+          </p:nvPr>
+        </p:nvSpPr>
+        <p:spPr/>
+        <p:txBody>
+          <a:bodyPr/>
+          <a:p>
+            <a:r>
+              <a:rPr lang="en-US" altLang="zh-CN"/>
+              <a:t>Overview</a:t>
+            </a:r>
+            <a:endParaRPr lang="en-US" altLang="zh-CN"/>
+          </a:p>
+        </p:txBody>
+      </p:sp>
+      <p:sp>
+        <p:nvSpPr>
+          <p:cNvPr id="3" name="内容占位符 2"/>
+          <p:cNvSpPr>
+            <a:spLocks noGrp="1"/>
+          </p:cNvSpPr>
+          <p:nvPr>
+            <p:ph idx="1"/>
+          </p:nvPr>
+        </p:nvSpPr>
+        <p:spPr/>
+        <p:txBody>
+          <a:bodyPr/>
+          <a:p>
+            <a:r>
+              <a:rPr lang="en-US" altLang="zh-CN"/>
+              <a:t>ZAP (Zad Attack Proxy)</a:t>
+            </a:r>
+            <a:endParaRPr lang="en-US" altLang="zh-CN"/>
+          </a:p>
+          <a:p>
+            <a:pPr lvl="1"/>
+            <a:r>
+              <a:rPr lang="en-US" altLang="zh-CN"/>
+              <a:t>https://www.zaproxy.org/</a:t>
+            </a:r>
+            <a:endParaRPr lang="en-US" altLang="zh-CN"/>
+          </a:p>
+          <a:p>
+            <a:pPr lvl="1"/>
+            <a:r>
+              <a:rPr lang="en-US" altLang="zh-CN"/>
+              <a:t>desktop app, free and open source</a:t>
+            </a:r>
+            <a:endParaRPr lang="en-US" altLang="zh-CN"/>
+          </a:p>
+          <a:p>
+            <a:pPr lvl="1"/>
+            <a:r>
+              <a:rPr lang="en-US" altLang="zh-CN"/>
+              <a:t>most widely used web app scanner</a:t>
+            </a:r>
+            <a:endParaRPr lang="en-US" altLang="zh-CN"/>
+          </a:p>
+          <a:p>
+            <a:pPr lvl="1"/>
+            <a:r>
+              <a:rPr lang="en-US" altLang="zh-CN"/>
+              <a:t>export pdf/html reports</a:t>
             </a:r>
             <a:endParaRPr lang="en-US" altLang="zh-CN"/>
           </a:p>
@@ -23156,7 +24644,6 @@
   <p:tag name="KSO_WM_BEAUTIFY_FLAG" val="#wm#"/>
   <p:tag name="KSO_WM_TEMPLATE_CATEGORY" val="custom"/>
   <p:tag name="KSO_WM_TEMPLATE_INDEX" val="160402"/>
-  <p:tag name="KSO_WM_SPECIAL_SOURCE" val="bdnull"/>
 </p:tagLst>
 </file>
 
@@ -23193,13 +24680,15 @@
   <p:tag name="KSO_WM_BEAUTIFY_FLAG" val="#wm#"/>
   <p:tag name="KSO_WM_TEMPLATE_CATEGORY" val="custom"/>
   <p:tag name="KSO_WM_TEMPLATE_INDEX" val="160402"/>
+  <p:tag name="KSO_WM_SPECIAL_SOURCE" val="bdnull"/>
 </p:tagLst>
 </file>
 
 <file path=ppt/tags/tag52.xml><?xml version="1.0" encoding="utf-8"?>
 <p:tagLst xmlns:p="http://schemas.openxmlformats.org/presentationml/2006/main">
-  <p:tag name="TABLE_ENDDRAG_ORIGIN_RECT" val="633*270"/>
-  <p:tag name="TABLE_ENDDRAG_RECT" val="27*95*633*270"/>
+  <p:tag name="KSO_WM_BEAUTIFY_FLAG" val="#wm#"/>
+  <p:tag name="KSO_WM_TEMPLATE_CATEGORY" val="custom"/>
+  <p:tag name="KSO_WM_TEMPLATE_INDEX" val="160402"/>
 </p:tagLst>
 </file>
 
@@ -23208,14 +24697,13 @@
   <p:tag name="KSO_WM_BEAUTIFY_FLAG" val="#wm#"/>
   <p:tag name="KSO_WM_TEMPLATE_CATEGORY" val="custom"/>
   <p:tag name="KSO_WM_TEMPLATE_INDEX" val="160402"/>
-  <p:tag name="KSO_WM_SPECIAL_SOURCE" val="bdnull"/>
 </p:tagLst>
 </file>
 
 <file path=ppt/tags/tag54.xml><?xml version="1.0" encoding="utf-8"?>
 <p:tagLst xmlns:p="http://schemas.openxmlformats.org/presentationml/2006/main">
-  <p:tag name="TABLE_ENDDRAG_ORIGIN_RECT" val="871*191"/>
-  <p:tag name="TABLE_ENDDRAG_RECT" val="66*99*871*191"/>
+  <p:tag name="TABLE_ENDDRAG_ORIGIN_RECT" val="633*270"/>
+  <p:tag name="TABLE_ENDDRAG_RECT" val="27*95*633*270"/>
 </p:tagLst>
 </file>
 
@@ -23224,14 +24712,14 @@
   <p:tag name="KSO_WM_BEAUTIFY_FLAG" val="#wm#"/>
   <p:tag name="KSO_WM_TEMPLATE_CATEGORY" val="custom"/>
   <p:tag name="KSO_WM_TEMPLATE_INDEX" val="160402"/>
+  <p:tag name="KSO_WM_SPECIAL_SOURCE" val="bdnull"/>
 </p:tagLst>
 </file>
 
 <file path=ppt/tags/tag56.xml><?xml version="1.0" encoding="utf-8"?>
 <p:tagLst xmlns:p="http://schemas.openxmlformats.org/presentationml/2006/main">
-  <p:tag name="KSO_WM_BEAUTIFY_FLAG" val="#wm#"/>
-  <p:tag name="KSO_WM_TEMPLATE_CATEGORY" val="custom"/>
-  <p:tag name="KSO_WM_TEMPLATE_INDEX" val="160402"/>
+  <p:tag name="TABLE_ENDDRAG_ORIGIN_RECT" val="871*191"/>
+  <p:tag name="TABLE_ENDDRAG_RECT" val="66*99*871*191"/>
 </p:tagLst>
 </file>
 
@@ -23248,7 +24736,6 @@
   <p:tag name="KSO_WM_BEAUTIFY_FLAG" val="#wm#"/>
   <p:tag name="KSO_WM_TEMPLATE_CATEGORY" val="custom"/>
   <p:tag name="KSO_WM_TEMPLATE_INDEX" val="160402"/>
-  <p:tag name="KSO_WM_SPECIAL_SOURCE" val="bdnull"/>
 </p:tagLst>
 </file>
 
@@ -23257,7 +24744,6 @@
   <p:tag name="KSO_WM_BEAUTIFY_FLAG" val="#wm#"/>
   <p:tag name="KSO_WM_TEMPLATE_CATEGORY" val="custom"/>
   <p:tag name="KSO_WM_TEMPLATE_INDEX" val="160402"/>
-  <p:tag name="KSO_WM_SPECIAL_SOURCE" val="bdnull"/>
 </p:tagLst>
 </file>
 
@@ -23337,6 +24823,7 @@
   <p:tag name="KSO_WM_BEAUTIFY_FLAG" val="#wm#"/>
   <p:tag name="KSO_WM_TEMPLATE_CATEGORY" val="custom"/>
   <p:tag name="KSO_WM_TEMPLATE_INDEX" val="160402"/>
+  <p:tag name="KSO_WM_SPECIAL_SOURCE" val="bdnull"/>
 </p:tagLst>
 </file>
 
@@ -23380,7 +24867,6 @@
   <p:tag name="KSO_WM_BEAUTIFY_FLAG" val="#wm#"/>
   <p:tag name="KSO_WM_TEMPLATE_CATEGORY" val="custom"/>
   <p:tag name="KSO_WM_TEMPLATE_INDEX" val="160402"/>
-  <p:tag name="KSO_WM_SPECIAL_SOURCE" val="bdnull"/>
 </p:tagLst>
 </file>
 
@@ -23449,7 +24935,10 @@
 
 <file path=ppt/tags/tag78.xml><?xml version="1.0" encoding="utf-8"?>
 <p:tagLst xmlns:p="http://schemas.openxmlformats.org/presentationml/2006/main">
-  <p:tag name="KSO_WM_UNIT_PLACING_PICTURE_USER_VIEWPORT" val="{&quot;height&quot;:6120,&quot;width&quot;:9264}"/>
+  <p:tag name="KSO_WM_BEAUTIFY_FLAG" val="#wm#"/>
+  <p:tag name="KSO_WM_TEMPLATE_CATEGORY" val="custom"/>
+  <p:tag name="KSO_WM_TEMPLATE_INDEX" val="160402"/>
+  <p:tag name="KSO_WM_SPECIAL_SOURCE" val="bdnull"/>
 </p:tagLst>
 </file>
 
@@ -23472,10 +24961,7 @@
 
 <file path=ppt/tags/tag80.xml><?xml version="1.0" encoding="utf-8"?>
 <p:tagLst xmlns:p="http://schemas.openxmlformats.org/presentationml/2006/main">
-  <p:tag name="KSO_WM_BEAUTIFY_FLAG" val="#wm#"/>
-  <p:tag name="KSO_WM_TEMPLATE_CATEGORY" val="custom"/>
-  <p:tag name="KSO_WM_TEMPLATE_INDEX" val="160402"/>
-  <p:tag name="KSO_WM_SPECIAL_SOURCE" val="bdnull"/>
+  <p:tag name="KSO_WM_UNIT_PLACING_PICTURE_USER_VIEWPORT" val="{&quot;height&quot;:6120,&quot;width&quot;:9264}"/>
 </p:tagLst>
 </file>
 
@@ -23493,6 +24979,7 @@
   <p:tag name="KSO_WM_BEAUTIFY_FLAG" val="#wm#"/>
   <p:tag name="KSO_WM_TEMPLATE_CATEGORY" val="custom"/>
   <p:tag name="KSO_WM_TEMPLATE_INDEX" val="160402"/>
+  <p:tag name="KSO_WM_SPECIAL_SOURCE" val="bdnull"/>
 </p:tagLst>
 </file>
 
@@ -23501,6 +24988,7 @@
   <p:tag name="KSO_WM_BEAUTIFY_FLAG" val="#wm#"/>
   <p:tag name="KSO_WM_TEMPLATE_CATEGORY" val="custom"/>
   <p:tag name="KSO_WM_TEMPLATE_INDEX" val="160402"/>
+  <p:tag name="KSO_WM_SPECIAL_SOURCE" val="bdnull"/>
 </p:tagLst>
 </file>
 
@@ -23522,11 +25010,33 @@
 
 <file path=ppt/tags/tag86.xml><?xml version="1.0" encoding="utf-8"?>
 <p:tagLst xmlns:p="http://schemas.openxmlformats.org/presentationml/2006/main">
-  <p:tag name="KSO_DOCER_TEMPLATE_OPEN_ONCE_MARK" val="1"/>
-  <p:tag name="COMMONDATA" val="eyJoZGlkIjoiYjRhZjQ5NWVmZmQxNmM3NmNkNDYxNWRmNzNmMjA1ZDAifQ=="/>
-  <p:tag name="KSO_WPP_MARK_KEY" val="409d257b-de08-4ad9-871a-703355bca735"/>
-  <p:tag name="commondata" val="eyJoZGlkIjoiYjk5ODM0YmMxOWJiYWQyNDU4MGIzYWRmYTA0ZmI5NDcifQ=="/>
-  <p:tag name="resource_record_key" val="{&quot;13&quot;:[4563123],&quot;65&quot;:[160402]}"/>
+  <p:tag name="KSO_WM_BEAUTIFY_FLAG" val="#wm#"/>
+  <p:tag name="KSO_WM_TEMPLATE_CATEGORY" val="custom"/>
+  <p:tag name="KSO_WM_TEMPLATE_INDEX" val="160402"/>
+</p:tagLst>
+</file>
+
+<file path=ppt/tags/tag87.xml><?xml version="1.0" encoding="utf-8"?>
+<p:tagLst xmlns:p="http://schemas.openxmlformats.org/presentationml/2006/main">
+  <p:tag name="KSO_WM_BEAUTIFY_FLAG" val="#wm#"/>
+  <p:tag name="KSO_WM_TEMPLATE_CATEGORY" val="custom"/>
+  <p:tag name="KSO_WM_TEMPLATE_INDEX" val="160402"/>
+</p:tagLst>
+</file>
+
+<file path=ppt/tags/tag88.xml><?xml version="1.0" encoding="utf-8"?>
+<p:tagLst xmlns:p="http://schemas.openxmlformats.org/presentationml/2006/main">
+  <p:tag name="KSO_WM_BEAUTIFY_FLAG" val="#wm#"/>
+  <p:tag name="KSO_WM_TEMPLATE_CATEGORY" val="custom"/>
+  <p:tag name="KSO_WM_TEMPLATE_INDEX" val="160402"/>
+</p:tagLst>
+</file>
+
+<file path=ppt/tags/tag89.xml><?xml version="1.0" encoding="utf-8"?>
+<p:tagLst xmlns:p="http://schemas.openxmlformats.org/presentationml/2006/main">
+  <p:tag name="KSO_WM_BEAUTIFY_FLAG" val="#wm#"/>
+  <p:tag name="KSO_WM_TEMPLATE_CATEGORY" val="custom"/>
+  <p:tag name="KSO_WM_TEMPLATE_INDEX" val="160402"/>
 </p:tagLst>
 </file>
 
@@ -23536,6 +25046,32 @@
   <p:tag name="KSO_WM_TEMPLATE_CATEGORY" val="custom"/>
   <p:tag name="KSO_WM_TEMPLATE_INDEX" val="160402"/>
   <p:tag name="KSO_WM_SPECIAL_SOURCE" val="bdnull"/>
+</p:tagLst>
+</file>
+
+<file path=ppt/tags/tag90.xml><?xml version="1.0" encoding="utf-8"?>
+<p:tagLst xmlns:p="http://schemas.openxmlformats.org/presentationml/2006/main">
+  <p:tag name="KSO_WM_BEAUTIFY_FLAG" val="#wm#"/>
+  <p:tag name="KSO_WM_TEMPLATE_CATEGORY" val="custom"/>
+  <p:tag name="KSO_WM_TEMPLATE_INDEX" val="160402"/>
+</p:tagLst>
+</file>
+
+<file path=ppt/tags/tag91.xml><?xml version="1.0" encoding="utf-8"?>
+<p:tagLst xmlns:p="http://schemas.openxmlformats.org/presentationml/2006/main">
+  <p:tag name="KSO_WM_BEAUTIFY_FLAG" val="#wm#"/>
+  <p:tag name="KSO_WM_TEMPLATE_CATEGORY" val="custom"/>
+  <p:tag name="KSO_WM_TEMPLATE_INDEX" val="160402"/>
+</p:tagLst>
+</file>
+
+<file path=ppt/tags/tag92.xml><?xml version="1.0" encoding="utf-8"?>
+<p:tagLst xmlns:p="http://schemas.openxmlformats.org/presentationml/2006/main">
+  <p:tag name="KSO_DOCER_TEMPLATE_OPEN_ONCE_MARK" val="1"/>
+  <p:tag name="COMMONDATA" val="eyJoZGlkIjoiYjRhZjQ5NWVmZmQxNmM3NmNkNDYxNWRmNzNmMjA1ZDAifQ=="/>
+  <p:tag name="KSO_WPP_MARK_KEY" val="409d257b-de08-4ad9-871a-703355bca735"/>
+  <p:tag name="commondata" val="eyJoZGlkIjoiYjk5ODM0YmMxOWJiYWQyNDU4MGIzYWRmYTA0ZmI5NDcifQ=="/>
+  <p:tag name="resource_record_key" val="{&quot;13&quot;:[4563123],&quot;65&quot;:[160402]}"/>
 </p:tagLst>
 </file>
 
